--- a/DataAnalysis_Track/decks/DA_S07_Reading_a_file_and_looking_at_it.pptx
+++ b/DataAnalysis_Track/decks/DA_S07_Reading_a_file_and_looking_at_it.pptx
@@ -480,7 +480,7 @@
 </file>
 
 <file path=ppt/notesSlides/notesSlide1.xml><?xml version="1.0" encoding="utf-8"?>
-<p:notes xmlns:a="http://schemas.openxmlformats.org/drawingml/2006/main" xmlns:p="http://schemas.openxmlformats.org/presentationml/2006/main" xmlns:r="http://schemas.openxmlformats.org/officeDocument/2006/relationships">
+<p:notes xmlns:a="http://schemas.openxmlformats.org/drawingml/2006/main" xmlns:p="http://schemas.openxmlformats.org/presentationml/2006/main">
   <p:cSld>
     <p:spTree>
       <p:nvGrpSpPr>
@@ -524,7 +524,102 @@
           <a:lstStyle/>
           <a:p>
             <a:r>
+              <a:t>TEACHING PURPOSE</a:t>
+            </a:r>
+          </a:p>
+          <a:p>
+            <a:r>
+              <a:t>Reading a file, and looking at it</a:t>
+            </a:r>
+          </a:p>
+          <a:p>
+            <a:r>
+              <a:t/>
+            </a:r>
+          </a:p>
+          <a:p>
+            <a:r>
+              <a:t>LECTURER CUE</a:t>
+            </a:r>
+          </a:p>
+          <a:p>
+            <a:r>
               <a:t>Start on time.</a:t>
+            </a:r>
+          </a:p>
+          <a:p>
+            <a:r>
+              <a:t/>
+            </a:r>
+          </a:p>
+          <a:p>
+            <a:r>
+              <a:t>EXPLAIN IN ORDINARY WORDS</a:t>
+            </a:r>
+          </a:p>
+          <a:p>
+            <a:r>
+              <a:t>A DataFrame is a labelled table. A Series is a single labelled sequence, often one column. A dtype describes stored values, but the import may infer something unsuitable.</a:t>
+            </a:r>
+          </a:p>
+          <a:p>
+            <a:r>
+              <a:t/>
+            </a:r>
+          </a:p>
+          <a:p>
+            <a:r>
+              <a:t>CHECK AND EXPECTED ANSWER</a:t>
+            </a:r>
+          </a:p>
+          <a:p>
+            <a:r>
+              <a:t>Does a price that looks numeric prove the column is numeric? No. Inspect its dtype and troublesome values before conversion.</a:t>
+            </a:r>
+          </a:p>
+          <a:p>
+            <a:r>
+              <a:t/>
+            </a:r>
+          </a:p>
+          <a:p>
+            <a:r>
+              <a:t>IF LEARNERS ARE STUCK</a:t>
+            </a:r>
+          </a:p>
+          <a:p>
+            <a:r>
+              <a:t>Use head, shape and dtypes to locate the table, count rows/columns and inspect storage. Check units and missing values before calculating.</a:t>
+            </a:r>
+          </a:p>
+          <a:p>
+            <a:r>
+              <a:t/>
+            </a:r>
+          </a:p>
+          <a:p>
+            <a:r>
+              <a:t>WORKBOOK CLARIFICATION</a:t>
+            </a:r>
+          </a:p>
+          <a:p>
+            <a:r>
+              <a:t>Do not say an Excel workbook cannot open solely because the combined row count exceeds one worksheet limit. Check its sheet names. pandas.read_excel uses the first sheet by default; sheet_name=None returns a dictionary of all sheets. Select or combine compatible sheets deliberately and check the resulting date range. Source: https://pandas.pydata.org/docs/reference/api/pandas.read_excel.html</a:t>
+            </a:r>
+          </a:p>
+          <a:p>
+            <a:r>
+              <a:t/>
+            </a:r>
+          </a:p>
+          <a:p>
+            <a:r>
+              <a:t>NEXT</a:t>
+            </a:r>
+          </a:p>
+          <a:p>
+            <a:r>
+              <a:t>Where tonight sits. Move on after a learner can explain the current example or required action.</a:t>
             </a:r>
           </a:p>
         </p:txBody>
@@ -550,7 +645,7 @@
 </file>
 
 <file path=ppt/notesSlides/notesSlide10.xml><?xml version="1.0" encoding="utf-8"?>
-<p:notes xmlns:a="http://schemas.openxmlformats.org/drawingml/2006/main" xmlns:p="http://schemas.openxmlformats.org/presentationml/2006/main" xmlns:r="http://schemas.openxmlformats.org/officeDocument/2006/relationships">
+<p:notes xmlns:a="http://schemas.openxmlformats.org/drawingml/2006/main" xmlns:p="http://schemas.openxmlformats.org/presentationml/2006/main">
   <p:cSld>
     <p:spTree>
       <p:nvGrpSpPr>
@@ -594,7 +689,57 @@
           <a:lstStyle/>
           <a:p>
             <a:r>
+              <a:t>TEACHING PURPOSE</a:t>
+            </a:r>
+          </a:p>
+          <a:p>
+            <a:r>
+              <a:t>Break</a:t>
+            </a:r>
+          </a:p>
+          <a:p>
+            <a:r>
+              <a:t/>
+            </a:r>
+          </a:p>
+          <a:p>
+            <a:r>
+              <a:t>CONNECT</a:t>
+            </a:r>
+          </a:p>
+          <a:p>
+            <a:r>
+              <a:t>Build on the preceding slide: The six commands. Learn the order, not the words..</a:t>
+            </a:r>
+          </a:p>
+          <a:p>
+            <a:r>
+              <a:t/>
+            </a:r>
+          </a:p>
+          <a:p>
+            <a:r>
+              <a:t>LECTURER CUE</a:t>
+            </a:r>
+          </a:p>
+          <a:p>
+            <a:r>
               <a:t>Ten minutes.</a:t>
+            </a:r>
+          </a:p>
+          <a:p>
+            <a:r>
+              <a:t/>
+            </a:r>
+          </a:p>
+          <a:p>
+            <a:r>
+              <a:t>NEXT</a:t>
+            </a:r>
+          </a:p>
+          <a:p>
+            <a:r>
+              <a:t>Selecting, filtering, and the type that lies. Move on after a learner can explain the current example or required action.</a:t>
             </a:r>
           </a:p>
         </p:txBody>
@@ -619,8 +764,8 @@
 </p:notes>
 </file>
 
-<file path=ppt/notesSlides/notesSlide11.xml><?xml version="1.0" encoding="utf-8"?>
-<p:notes xmlns:a="http://schemas.openxmlformats.org/drawingml/2006/main" xmlns:p="http://schemas.openxmlformats.org/presentationml/2006/main" xmlns:r="http://schemas.openxmlformats.org/officeDocument/2006/relationships">
+<file path=ppt/notesSlides/notesSlide10006.xml><?xml version="1.0" encoding="utf-8"?>
+<p:notes xmlns:a="http://schemas.openxmlformats.org/drawingml/2006/main" xmlns:p="http://schemas.openxmlformats.org/presentationml/2006/main">
   <p:cSld>
     <p:spTree>
       <p:nvGrpSpPr>
@@ -662,7 +807,121 @@
         <p:txBody>
           <a:bodyPr/>
           <a:lstStyle/>
-          <a:p/>
+          <a:p>
+            <a:r>
+              <a:t>TEACHING PURPOSE</a:t>
+            </a:r>
+          </a:p>
+          <a:p>
+            <a:r>
+              <a:t>Six commands, on any file you have never seen</a:t>
+            </a:r>
+          </a:p>
+          <a:p>
+            <a:r>
+              <a:t/>
+            </a:r>
+          </a:p>
+          <a:p>
+            <a:r>
+              <a:t>CONNECT</a:t>
+            </a:r>
+          </a:p>
+          <a:p>
+            <a:r>
+              <a:t>Build on the preceding slide: Somebody sends you a file you have never seen..</a:t>
+            </a:r>
+          </a:p>
+          <a:p>
+            <a:r>
+              <a:t/>
+            </a:r>
+          </a:p>
+          <a:p>
+            <a:r>
+              <a:t>EXPLAIN IN ORDINARY WORDS</a:t>
+            </a:r>
+          </a:p>
+          <a:p>
+            <a:r>
+              <a:t>A DataFrame is a labelled table. A Series is a single labelled sequence, often one column. A dtype describes stored values, but the import may infer something unsuitable.</a:t>
+            </a:r>
+          </a:p>
+          <a:p>
+            <a:r>
+              <a:t/>
+            </a:r>
+          </a:p>
+          <a:p>
+            <a:r>
+              <a:t>CHECK AND EXPECTED ANSWER</a:t>
+            </a:r>
+          </a:p>
+          <a:p>
+            <a:r>
+              <a:t>Does a price that looks numeric prove the column is numeric? No. Inspect its dtype and troublesome values before conversion.</a:t>
+            </a:r>
+          </a:p>
+          <a:p>
+            <a:r>
+              <a:t/>
+            </a:r>
+          </a:p>
+          <a:p>
+            <a:r>
+              <a:t>IF LEARNERS ARE STUCK</a:t>
+            </a:r>
+          </a:p>
+          <a:p>
+            <a:r>
+              <a:t>Use head, shape and dtypes to locate the table, count rows/columns and inspect storage. Check units and missing values before calculating.</a:t>
+            </a:r>
+          </a:p>
+          <a:p>
+            <a:r>
+              <a:t/>
+            </a:r>
+          </a:p>
+          <a:p>
+            <a:r>
+              <a:t>WORKBOOK CLARIFICATION</a:t>
+            </a:r>
+          </a:p>
+          <a:p>
+            <a:r>
+              <a:t>Do not say an Excel workbook cannot open solely because the combined row count exceeds one worksheet limit. Check its sheet names. pandas.read_excel uses the first sheet by default; sheet_name=None returns a dictionary of all sheets. Select or combine compatible sheets deliberately and check the resulting date range. Source: https://pandas.pydata.org/docs/reference/api/pandas.read_excel.html</a:t>
+            </a:r>
+          </a:p>
+          <a:p>
+            <a:r>
+              <a:t/>
+            </a:r>
+          </a:p>
+          <a:p>
+            <a:r>
+              <a:t>TYPE NUANCE</a:t>
+            </a:r>
+          </a:p>
+          <a:p>
+            <a:r>
+              <a:t>An object dtype alone does not prove that a column contains bad numeric values; it can hold Python objects, including numbers. Inspect values and conversion results. Missing values may display as NaN, None, NaT or pandas NA depending on dtype.</a:t>
+            </a:r>
+          </a:p>
+          <a:p>
+            <a:r>
+              <a:t/>
+            </a:r>
+          </a:p>
+          <a:p>
+            <a:r>
+              <a:t>NEXT</a:t>
+            </a:r>
+          </a:p>
+          <a:p>
+            <a:r>
+              <a:t>Series. Move on after a learner can explain the current example or required action.</a:t>
+            </a:r>
+          </a:p>
         </p:txBody>
       </p:sp>
       <p:sp>
@@ -685,8 +944,8 @@
 </p:notes>
 </file>
 
-<file path=ppt/notesSlides/notesSlide12.xml><?xml version="1.0" encoding="utf-8"?>
-<p:notes xmlns:a="http://schemas.openxmlformats.org/drawingml/2006/main" xmlns:p="http://schemas.openxmlformats.org/presentationml/2006/main" xmlns:r="http://schemas.openxmlformats.org/officeDocument/2006/relationships">
+<file path=ppt/notesSlides/notesSlide10012.xml><?xml version="1.0" encoding="utf-8"?>
+<p:notes xmlns:a="http://schemas.openxmlformats.org/drawingml/2006/main" xmlns:p="http://schemas.openxmlformats.org/presentationml/2006/main">
   <p:cSld>
     <p:spTree>
       <p:nvGrpSpPr>
@@ -728,7 +987,91 @@
         <p:txBody>
           <a:bodyPr/>
           <a:lstStyle/>
-          <a:p/>
+          <a:p>
+            <a:r>
+              <a:t>TEACHING PURPOSE</a:t>
+            </a:r>
+          </a:p>
+          <a:p>
+            <a:r>
+              <a:t>Selecting, filtering, and the type that lies</a:t>
+            </a:r>
+          </a:p>
+          <a:p>
+            <a:r>
+              <a:t/>
+            </a:r>
+          </a:p>
+          <a:p>
+            <a:r>
+              <a:t>CONNECT</a:t>
+            </a:r>
+          </a:p>
+          <a:p>
+            <a:r>
+              <a:t>Build on the preceding slide: Break.</a:t>
+            </a:r>
+          </a:p>
+          <a:p>
+            <a:r>
+              <a:t/>
+            </a:r>
+          </a:p>
+          <a:p>
+            <a:r>
+              <a:t>EXPLAIN IN ORDINARY WORDS</a:t>
+            </a:r>
+          </a:p>
+          <a:p>
+            <a:r>
+              <a:t>A condition is a True/False question. Python executes the matching indented branch. = assigns; == compares. &gt;= includes the boundary, while &gt; excludes it.</a:t>
+            </a:r>
+          </a:p>
+          <a:p>
+            <a:r>
+              <a:t/>
+            </a:r>
+          </a:p>
+          <a:p>
+            <a:r>
+              <a:t>CHECK AND EXPECTED ANSWER</a:t>
+            </a:r>
+          </a:p>
+          <a:p>
+            <a:r>
+              <a:t>With value 30, is value &gt;= 30 true? Yes. Is value &gt; 30 true? No.</a:t>
+            </a:r>
+          </a:p>
+          <a:p>
+            <a:r>
+              <a:t/>
+            </a:r>
+          </a:p>
+          <a:p>
+            <a:r>
+              <a:t>IF LEARNERS ARE STUCK</a:t>
+            </a:r>
+          </a:p>
+          <a:p>
+            <a:r>
+              <a:t>Try one value below, at and above the boundary before running the code.</a:t>
+            </a:r>
+          </a:p>
+          <a:p>
+            <a:r>
+              <a:t/>
+            </a:r>
+          </a:p>
+          <a:p>
+            <a:r>
+              <a:t>NEXT</a:t>
+            </a:r>
+          </a:p>
+          <a:p>
+            <a:r>
+              <a:t>Selecting and filtering, which is autofilter written down. Move on after a learner can explain the current example or required action.</a:t>
+            </a:r>
+          </a:p>
         </p:txBody>
       </p:sp>
       <p:sp>
@@ -751,8 +1094,8 @@
 </p:notes>
 </file>
 
-<file path=ppt/notesSlides/notesSlide13.xml><?xml version="1.0" encoding="utf-8"?>
-<p:notes xmlns:a="http://schemas.openxmlformats.org/drawingml/2006/main" xmlns:p="http://schemas.openxmlformats.org/presentationml/2006/main" xmlns:r="http://schemas.openxmlformats.org/officeDocument/2006/relationships">
+<file path=ppt/notesSlides/notesSlide11.xml><?xml version="1.0" encoding="utf-8"?>
+<p:notes xmlns:a="http://schemas.openxmlformats.org/drawingml/2006/main" xmlns:p="http://schemas.openxmlformats.org/presentationml/2006/main">
   <p:cSld>
     <p:spTree>
       <p:nvGrpSpPr>
@@ -796,7 +1139,87 @@
           <a:lstStyle/>
           <a:p>
             <a:r>
-              <a:t>The routine in a fixed order. Two minutes, and afterwards you can say what the file can and cannot answer.</a:t>
+              <a:t>TEACHING PURPOSE</a:t>
+            </a:r>
+          </a:p>
+          <a:p>
+            <a:r>
+              <a:t>Selecting and filtering, which is autofilter written down</a:t>
+            </a:r>
+          </a:p>
+          <a:p>
+            <a:r>
+              <a:t/>
+            </a:r>
+          </a:p>
+          <a:p>
+            <a:r>
+              <a:t>CONNECT</a:t>
+            </a:r>
+          </a:p>
+          <a:p>
+            <a:r>
+              <a:t>Build on the preceding slide: Selecting, filtering, and the type that lies.</a:t>
+            </a:r>
+          </a:p>
+          <a:p>
+            <a:r>
+              <a:t/>
+            </a:r>
+          </a:p>
+          <a:p>
+            <a:r>
+              <a:t>EXPLAIN IN ORDINARY WORDS</a:t>
+            </a:r>
+          </a:p>
+          <a:p>
+            <a:r>
+              <a:t>A list keeps items in order. Python positions start at zero. In [2,4,6], position 0 contains 2 and position 2 contains 6. A slice excludes its stop position.</a:t>
+            </a:r>
+          </a:p>
+          <a:p>
+            <a:r>
+              <a:t/>
+            </a:r>
+          </a:p>
+          <a:p>
+            <a:r>
+              <a:t>CHECK AND EXPECTED ANSWER</a:t>
+            </a:r>
+          </a:p>
+          <a:p>
+            <a:r>
+              <a:t>What is [2,4,6][1]? 4. Is there a position 3? No.</a:t>
+            </a:r>
+          </a:p>
+          <a:p>
+            <a:r>
+              <a:t/>
+            </a:r>
+          </a:p>
+          <a:p>
+            <a:r>
+              <a:t>IF LEARNERS ARE STUCK</a:t>
+            </a:r>
+          </a:p>
+          <a:p>
+            <a:r>
+              <a:t>Draw three numbered boxes starting at zero. Keep the position separate from the value stored in it.</a:t>
+            </a:r>
+          </a:p>
+          <a:p>
+            <a:r>
+              <a:t/>
+            </a:r>
+          </a:p>
+          <a:p>
+            <a:r>
+              <a:t>NEXT</a:t>
+            </a:r>
+          </a:p>
+          <a:p>
+            <a:r>
+              <a:t>The type that lies. Move on after a learner can explain the current example or required action.</a:t>
             </a:r>
           </a:p>
         </p:txBody>
@@ -821,8 +1244,8 @@
 </p:notes>
 </file>
 
-<file path=ppt/notesSlides/notesSlide14.xml><?xml version="1.0" encoding="utf-8"?>
-<p:notes xmlns:a="http://schemas.openxmlformats.org/drawingml/2006/main" xmlns:p="http://schemas.openxmlformats.org/presentationml/2006/main" xmlns:r="http://schemas.openxmlformats.org/officeDocument/2006/relationships">
+<file path=ppt/notesSlides/notesSlide12.xml><?xml version="1.0" encoding="utf-8"?>
+<p:notes xmlns:a="http://schemas.openxmlformats.org/drawingml/2006/main" xmlns:p="http://schemas.openxmlformats.org/presentationml/2006/main">
   <p:cSld>
     <p:spTree>
       <p:nvGrpSpPr>
@@ -864,7 +1287,106 @@
         <p:txBody>
           <a:bodyPr/>
           <a:lstStyle/>
-          <a:p/>
+          <a:p>
+            <a:r>
+              <a:t>TEACHING PURPOSE</a:t>
+            </a:r>
+          </a:p>
+          <a:p>
+            <a:r>
+              <a:t>The type that lies</a:t>
+            </a:r>
+          </a:p>
+          <a:p>
+            <a:r>
+              <a:t/>
+            </a:r>
+          </a:p>
+          <a:p>
+            <a:r>
+              <a:t>CONNECT</a:t>
+            </a:r>
+          </a:p>
+          <a:p>
+            <a:r>
+              <a:t>Build on the preceding slide: Selecting and filtering, which is autofilter written down.</a:t>
+            </a:r>
+          </a:p>
+          <a:p>
+            <a:r>
+              <a:t/>
+            </a:r>
+          </a:p>
+          <a:p>
+            <a:r>
+              <a:t>EXPLAIN IN ORDINARY WORDS</a:t>
+            </a:r>
+          </a:p>
+          <a:p>
+            <a:r>
+              <a:t>Grain means what one row represents. A key identifies a row; a primary key may use more than one column. A join matches keys, and multiple matches can multiply rows.</a:t>
+            </a:r>
+          </a:p>
+          <a:p>
+            <a:r>
+              <a:t/>
+            </a:r>
+          </a:p>
+          <a:p>
+            <a:r>
+              <a:t>CHECK AND EXPECTED ANSWER</a:t>
+            </a:r>
+          </a:p>
+          <a:p>
+            <a:r>
+              <a:t>One order has two lines. After joining orders to lines, how many rows for it? Two. Summing a repeated order-level total would double-count.</a:t>
+            </a:r>
+          </a:p>
+          <a:p>
+            <a:r>
+              <a:t/>
+            </a:r>
+          </a:p>
+          <a:p>
+            <a:r>
+              <a:t>IF LEARNERS ARE STUCK</a:t>
+            </a:r>
+          </a:p>
+          <a:p>
+            <a:r>
+              <a:t>Write one example row from each table. Circle keys and trace each match. Aggregate to the intended grain and check counts and totals.</a:t>
+            </a:r>
+          </a:p>
+          <a:p>
+            <a:r>
+              <a:t/>
+            </a:r>
+          </a:p>
+          <a:p>
+            <a:r>
+              <a:t>TYPE NUANCE</a:t>
+            </a:r>
+          </a:p>
+          <a:p>
+            <a:r>
+              <a:t>An object dtype alone does not prove that a column contains bad numeric values; it can hold Python objects, including numbers. Inspect values and conversion results. Missing values may display as NaN, None, NaT or pandas NA depending on dtype.</a:t>
+            </a:r>
+          </a:p>
+          <a:p>
+            <a:r>
+              <a:t/>
+            </a:r>
+          </a:p>
+          <a:p>
+            <a:r>
+              <a:t>NEXT</a:t>
+            </a:r>
+          </a:p>
+          <a:p>
+            <a:r>
+              <a:t>Profiling a file you have never seen. Move on after a learner can explain the current example or required action.</a:t>
+            </a:r>
+          </a:p>
         </p:txBody>
       </p:sp>
       <p:sp>
@@ -887,8 +1409,8 @@
 </p:notes>
 </file>
 
-<file path=ppt/notesSlides/notesSlide15.xml><?xml version="1.0" encoding="utf-8"?>
-<p:notes xmlns:a="http://schemas.openxmlformats.org/drawingml/2006/main" xmlns:p="http://schemas.openxmlformats.org/presentationml/2006/main" xmlns:r="http://schemas.openxmlformats.org/officeDocument/2006/relationships">
+<file path=ppt/notesSlides/notesSlide13.xml><?xml version="1.0" encoding="utf-8"?>
+<p:notes xmlns:a="http://schemas.openxmlformats.org/drawingml/2006/main" xmlns:p="http://schemas.openxmlformats.org/presentationml/2006/main">
   <p:cSld>
     <p:spTree>
       <p:nvGrpSpPr>
@@ -932,7 +1454,132 @@
           <a:lstStyle/>
           <a:p>
             <a:r>
-              <a:t>Reading a file and trusting the types. A column of numbers arriving as text is the commonest cause of a wrong answer in pandas, and nothing raises an error.</a:t>
+              <a:t>TEACHING PURPOSE</a:t>
+            </a:r>
+          </a:p>
+          <a:p>
+            <a:r>
+              <a:t>Profiling a file you have never seen</a:t>
+            </a:r>
+          </a:p>
+          <a:p>
+            <a:r>
+              <a:t/>
+            </a:r>
+          </a:p>
+          <a:p>
+            <a:r>
+              <a:t>CONNECT</a:t>
+            </a:r>
+          </a:p>
+          <a:p>
+            <a:r>
+              <a:t>Build on the preceding slide: The type that lies.</a:t>
+            </a:r>
+          </a:p>
+          <a:p>
+            <a:r>
+              <a:t/>
+            </a:r>
+          </a:p>
+          <a:p>
+            <a:r>
+              <a:t>LECTURER CUE</a:t>
+            </a:r>
+          </a:p>
+          <a:p>
+            <a:r>
+              <a:t>The routine in a fixed order. Two minutes, and afterwards you can say what the file can and cannot answer.</a:t>
+            </a:r>
+          </a:p>
+          <a:p>
+            <a:r>
+              <a:t/>
+            </a:r>
+          </a:p>
+          <a:p>
+            <a:r>
+              <a:t>EXPLAIN IN ORDINARY WORDS</a:t>
+            </a:r>
+          </a:p>
+          <a:p>
+            <a:r>
+              <a:t>A DataFrame is a labelled table. A Series is a single labelled sequence, often one column. A dtype describes stored values, but the import may infer something unsuitable.</a:t>
+            </a:r>
+          </a:p>
+          <a:p>
+            <a:r>
+              <a:t/>
+            </a:r>
+          </a:p>
+          <a:p>
+            <a:r>
+              <a:t>CHECK AND EXPECTED ANSWER</a:t>
+            </a:r>
+          </a:p>
+          <a:p>
+            <a:r>
+              <a:t>Does a price that looks numeric prove the column is numeric? No. Inspect its dtype and troublesome values before conversion.</a:t>
+            </a:r>
+          </a:p>
+          <a:p>
+            <a:r>
+              <a:t/>
+            </a:r>
+          </a:p>
+          <a:p>
+            <a:r>
+              <a:t>IF LEARNERS ARE STUCK</a:t>
+            </a:r>
+          </a:p>
+          <a:p>
+            <a:r>
+              <a:t>Use head, shape and dtypes to locate the table, count rows/columns and inspect storage. Check units and missing values before calculating.</a:t>
+            </a:r>
+          </a:p>
+          <a:p>
+            <a:r>
+              <a:t/>
+            </a:r>
+          </a:p>
+          <a:p>
+            <a:r>
+              <a:t>WORKBOOK CLARIFICATION</a:t>
+            </a:r>
+          </a:p>
+          <a:p>
+            <a:r>
+              <a:t>Do not say an Excel workbook cannot open solely because the combined row count exceeds one worksheet limit. Check its sheet names. pandas.read_excel uses the first sheet by default; sheet_name=None returns a dictionary of all sheets. Select or combine compatible sheets deliberately and check the resulting date range. Source: https://pandas.pydata.org/docs/reference/api/pandas.read_excel.html</a:t>
+            </a:r>
+          </a:p>
+          <a:p>
+            <a:r>
+              <a:t/>
+            </a:r>
+          </a:p>
+          <a:p>
+            <a:r>
+              <a:t>TYPE NUANCE</a:t>
+            </a:r>
+          </a:p>
+          <a:p>
+            <a:r>
+              <a:t>An object dtype alone does not prove that a column contains bad numeric values; it can hold Python objects, including numbers. Inspect values and conversion results. Missing values may display as NaN, None, NaT or pandas NA depending on dtype.</a:t>
+            </a:r>
+          </a:p>
+          <a:p>
+            <a:r>
+              <a:t/>
+            </a:r>
+          </a:p>
+          <a:p>
+            <a:r>
+              <a:t>NEXT</a:t>
+            </a:r>
+          </a:p>
+          <a:p>
+            <a:r>
+              <a:t>A large workbook to inspect with pandas. Move on after a learner can explain the current example or required action.</a:t>
             </a:r>
           </a:p>
         </p:txBody>
@@ -957,8 +1604,8 @@
 </p:notes>
 </file>
 
-<file path=ppt/notesSlides/notesSlide16.xml><?xml version="1.0" encoding="utf-8"?>
-<p:notes xmlns:a="http://schemas.openxmlformats.org/drawingml/2006/main" xmlns:p="http://schemas.openxmlformats.org/presentationml/2006/main" xmlns:r="http://schemas.openxmlformats.org/officeDocument/2006/relationships">
+<file path=ppt/notesSlides/notesSlide14.xml><?xml version="1.0" encoding="utf-8"?>
+<p:notes xmlns:a="http://schemas.openxmlformats.org/drawingml/2006/main" xmlns:p="http://schemas.openxmlformats.org/presentationml/2006/main">
   <p:cSld>
     <p:spTree>
       <p:nvGrpSpPr>
@@ -1000,7 +1647,121 @@
         <p:txBody>
           <a:bodyPr/>
           <a:lstStyle/>
-          <a:p/>
+          <a:p>
+            <a:r>
+              <a:t>TEACHING PURPOSE</a:t>
+            </a:r>
+          </a:p>
+          <a:p>
+            <a:r>
+              <a:t>A large workbook to inspect with pandas</a:t>
+            </a:r>
+          </a:p>
+          <a:p>
+            <a:r>
+              <a:t/>
+            </a:r>
+          </a:p>
+          <a:p>
+            <a:r>
+              <a:t>CONNECT</a:t>
+            </a:r>
+          </a:p>
+          <a:p>
+            <a:r>
+              <a:t>Build on the preceding slide: Profiling a file you have never seen.</a:t>
+            </a:r>
+          </a:p>
+          <a:p>
+            <a:r>
+              <a:t/>
+            </a:r>
+          </a:p>
+          <a:p>
+            <a:r>
+              <a:t>EXPLAIN IN ORDINARY WORDS</a:t>
+            </a:r>
+          </a:p>
+          <a:p>
+            <a:r>
+              <a:t>A DataFrame is a labelled table. A Series is a single labelled sequence, often one column. A dtype describes stored values, but the import may infer something unsuitable.</a:t>
+            </a:r>
+          </a:p>
+          <a:p>
+            <a:r>
+              <a:t/>
+            </a:r>
+          </a:p>
+          <a:p>
+            <a:r>
+              <a:t>CHECK AND EXPECTED ANSWER</a:t>
+            </a:r>
+          </a:p>
+          <a:p>
+            <a:r>
+              <a:t>Does a price that looks numeric prove the column is numeric? No. Inspect its dtype and troublesome values before conversion.</a:t>
+            </a:r>
+          </a:p>
+          <a:p>
+            <a:r>
+              <a:t/>
+            </a:r>
+          </a:p>
+          <a:p>
+            <a:r>
+              <a:t>IF LEARNERS ARE STUCK</a:t>
+            </a:r>
+          </a:p>
+          <a:p>
+            <a:r>
+              <a:t>Use head, shape and dtypes to locate the table, count rows/columns and inspect storage. Check units and missing values before calculating.</a:t>
+            </a:r>
+          </a:p>
+          <a:p>
+            <a:r>
+              <a:t/>
+            </a:r>
+          </a:p>
+          <a:p>
+            <a:r>
+              <a:t>WORKBOOK CLARIFICATION</a:t>
+            </a:r>
+          </a:p>
+          <a:p>
+            <a:r>
+              <a:t>Do not say an Excel workbook cannot open solely because the combined row count exceeds one worksheet limit. Check its sheet names. pandas.read_excel uses the first sheet by default; sheet_name=None returns a dictionary of all sheets. Select or combine compatible sheets deliberately and check the resulting date range. Source: https://pandas.pydata.org/docs/reference/api/pandas.read_excel.html</a:t>
+            </a:r>
+          </a:p>
+          <a:p>
+            <a:r>
+              <a:t/>
+            </a:r>
+          </a:p>
+          <a:p>
+            <a:r>
+              <a:t>TYPE NUANCE</a:t>
+            </a:r>
+          </a:p>
+          <a:p>
+            <a:r>
+              <a:t>An object dtype alone does not prove that a column contains bad numeric values; it can hold Python objects, including numbers. Inspect values and conversion results. Missing values may display as NaN, None, NaT or pandas NA depending on dtype.</a:t>
+            </a:r>
+          </a:p>
+          <a:p>
+            <a:r>
+              <a:t/>
+            </a:r>
+          </a:p>
+          <a:p>
+            <a:r>
+              <a:t>NEXT</a:t>
+            </a:r>
+          </a:p>
+          <a:p>
+            <a:r>
+              <a:t>Reading a file and trusting the types. A column of numbers arriving as text is the commonest cause of a wrong answer in pandas, and nothing raises an error.. Move on after a learner can explain the current example or required action.</a:t>
+            </a:r>
+          </a:p>
         </p:txBody>
       </p:sp>
       <p:sp>
@@ -1023,8 +1784,8 @@
 </p:notes>
 </file>
 
-<file path=ppt/notesSlides/notesSlide17.xml><?xml version="1.0" encoding="utf-8"?>
-<p:notes xmlns:a="http://schemas.openxmlformats.org/drawingml/2006/main" xmlns:p="http://schemas.openxmlformats.org/presentationml/2006/main" xmlns:r="http://schemas.openxmlformats.org/officeDocument/2006/relationships">
+<file path=ppt/notesSlides/notesSlide15.xml><?xml version="1.0" encoding="utf-8"?>
+<p:notes xmlns:a="http://schemas.openxmlformats.org/drawingml/2006/main" xmlns:p="http://schemas.openxmlformats.org/presentationml/2006/main">
   <p:cSld>
     <p:spTree>
       <p:nvGrpSpPr>
@@ -1066,7 +1827,121 @@
         <p:txBody>
           <a:bodyPr/>
           <a:lstStyle/>
-          <a:p/>
+          <a:p>
+            <a:r>
+              <a:t>TEACHING PURPOSE</a:t>
+            </a:r>
+          </a:p>
+          <a:p>
+            <a:r>
+              <a:t>Reading a file and trusting the types. A column of numbers arriving as text is the commonest cause of a wrong answer in pandas, and nothing raises an error.</a:t>
+            </a:r>
+          </a:p>
+          <a:p>
+            <a:r>
+              <a:t/>
+            </a:r>
+          </a:p>
+          <a:p>
+            <a:r>
+              <a:t>CONNECT</a:t>
+            </a:r>
+          </a:p>
+          <a:p>
+            <a:r>
+              <a:t>Build on the preceding slide: A large workbook to inspect with pandas.</a:t>
+            </a:r>
+          </a:p>
+          <a:p>
+            <a:r>
+              <a:t/>
+            </a:r>
+          </a:p>
+          <a:p>
+            <a:r>
+              <a:t>LECTURER CUE</a:t>
+            </a:r>
+          </a:p>
+          <a:p>
+            <a:r>
+              <a:t>Reading a file and trusting the types. A column of numbers arriving as text is the commonest cause of a wrong answer in pandas, and nothing raises an error.</a:t>
+            </a:r>
+          </a:p>
+          <a:p>
+            <a:r>
+              <a:t/>
+            </a:r>
+          </a:p>
+          <a:p>
+            <a:r>
+              <a:t>EXPLAIN IN ORDINARY WORDS</a:t>
+            </a:r>
+          </a:p>
+          <a:p>
+            <a:r>
+              <a:t>A DataFrame is a labelled table. A Series is a single labelled sequence, often one column. A dtype describes stored values, but the import may infer something unsuitable.</a:t>
+            </a:r>
+          </a:p>
+          <a:p>
+            <a:r>
+              <a:t/>
+            </a:r>
+          </a:p>
+          <a:p>
+            <a:r>
+              <a:t>CHECK AND EXPECTED ANSWER</a:t>
+            </a:r>
+          </a:p>
+          <a:p>
+            <a:r>
+              <a:t>Does a price that looks numeric prove the column is numeric? No. Inspect its dtype and troublesome values before conversion.</a:t>
+            </a:r>
+          </a:p>
+          <a:p>
+            <a:r>
+              <a:t/>
+            </a:r>
+          </a:p>
+          <a:p>
+            <a:r>
+              <a:t>IF LEARNERS ARE STUCK</a:t>
+            </a:r>
+          </a:p>
+          <a:p>
+            <a:r>
+              <a:t>Use head, shape and dtypes to locate the table, count rows/columns and inspect storage. Check units and missing values before calculating.</a:t>
+            </a:r>
+          </a:p>
+          <a:p>
+            <a:r>
+              <a:t/>
+            </a:r>
+          </a:p>
+          <a:p>
+            <a:r>
+              <a:t>WORKBOOK CLARIFICATION</a:t>
+            </a:r>
+          </a:p>
+          <a:p>
+            <a:r>
+              <a:t>Do not say an Excel workbook cannot open solely because the combined row count exceeds one worksheet limit. Check its sheet names. pandas.read_excel uses the first sheet by default; sheet_name=None returns a dictionary of all sheets. Select or combine compatible sheets deliberately and check the resulting date range. Source: https://pandas.pydata.org/docs/reference/api/pandas.read_excel.html</a:t>
+            </a:r>
+          </a:p>
+          <a:p>
+            <a:r>
+              <a:t/>
+            </a:r>
+          </a:p>
+          <a:p>
+            <a:r>
+              <a:t>NEXT</a:t>
+            </a:r>
+          </a:p>
+          <a:p>
+            <a:r>
+              <a:t>Can you answer these?. Move on after a learner can explain the current example or required action.</a:t>
+            </a:r>
+          </a:p>
         </p:txBody>
       </p:sp>
       <p:sp>
@@ -1089,8 +1964,8 @@
 </p:notes>
 </file>
 
-<file path=ppt/notesSlides/notesSlide18.xml><?xml version="1.0" encoding="utf-8"?>
-<p:notes xmlns:a="http://schemas.openxmlformats.org/drawingml/2006/main" xmlns:p="http://schemas.openxmlformats.org/presentationml/2006/main" xmlns:r="http://schemas.openxmlformats.org/officeDocument/2006/relationships">
+<file path=ppt/notesSlides/notesSlide16.xml><?xml version="1.0" encoding="utf-8"?>
+<p:notes xmlns:a="http://schemas.openxmlformats.org/drawingml/2006/main" xmlns:p="http://schemas.openxmlformats.org/presentationml/2006/main">
   <p:cSld>
     <p:spTree>
       <p:nvGrpSpPr>
@@ -1134,7 +2009,172 @@
           <a:lstStyle/>
           <a:p>
             <a:r>
-              <a:t>Download it, open it in pandas, and produce the one-page profile. You are not cleaning it tonight. The goal is to be able to say, in three sentences, what the file is a record of and what it cannot tell you.</a:t>
+              <a:t>TEACHING PURPOSE</a:t>
+            </a:r>
+          </a:p>
+          <a:p>
+            <a:r>
+              <a:t>Can you answer these?</a:t>
+            </a:r>
+          </a:p>
+          <a:p>
+            <a:r>
+              <a:t/>
+            </a:r>
+          </a:p>
+          <a:p>
+            <a:r>
+              <a:t>CONNECT</a:t>
+            </a:r>
+          </a:p>
+          <a:p>
+            <a:r>
+              <a:t>Build on the preceding slide: Reading a file and trusting the types. A column of numbers arriving as text is the commonest cause of a wrong answer in pandas, and nothing raises an error..</a:t>
+            </a:r>
+          </a:p>
+          <a:p>
+            <a:r>
+              <a:t/>
+            </a:r>
+          </a:p>
+          <a:p>
+            <a:r>
+              <a:t>EXPLAIN IN ORDINARY WORDS</a:t>
+            </a:r>
+          </a:p>
+          <a:p>
+            <a:r>
+              <a:t>A DataFrame is a labelled table. A Series is a single labelled sequence, often one column. A dtype describes stored values, but the import may infer something unsuitable.</a:t>
+            </a:r>
+          </a:p>
+          <a:p>
+            <a:r>
+              <a:t/>
+            </a:r>
+          </a:p>
+          <a:p>
+            <a:r>
+              <a:t>CHECK AND EXPECTED ANSWER</a:t>
+            </a:r>
+          </a:p>
+          <a:p>
+            <a:r>
+              <a:t>Does a price that looks numeric prove the column is numeric? No. Inspect its dtype and troublesome values before conversion.</a:t>
+            </a:r>
+          </a:p>
+          <a:p>
+            <a:r>
+              <a:t/>
+            </a:r>
+          </a:p>
+          <a:p>
+            <a:r>
+              <a:t>IF LEARNERS ARE STUCK</a:t>
+            </a:r>
+          </a:p>
+          <a:p>
+            <a:r>
+              <a:t>Use head, shape and dtypes to locate the table, count rows/columns and inspect storage. Check units and missing values before calculating.</a:t>
+            </a:r>
+          </a:p>
+          <a:p>
+            <a:r>
+              <a:t/>
+            </a:r>
+          </a:p>
+          <a:p>
+            <a:r>
+              <a:t>DISCUSSION KEY FOR THIS SLIDE</a:t>
+            </a:r>
+          </a:p>
+          <a:p>
+            <a:r>
+              <a:t>ANSWERS</a:t>
+            </a:r>
+          </a:p>
+          <a:p>
+            <a:r>
+              <a:t>How did you do?</a:t>
+            </a:r>
+          </a:p>
+          <a:p>
+            <a:r>
+              <a:t>A</a:t>
+            </a:r>
+          </a:p>
+          <a:p>
+            <a:r>
+              <a:t>A price column with dtype object</a:t>
+            </a:r>
+          </a:p>
+          <a:p>
+            <a:r>
+              <a:t>Something in it is not a number: a comma, a currency symbol, a blank, or a word. It does not tell you which or how many, and value_counts() on the odd values is how you find out.</a:t>
+            </a:r>
+          </a:p>
+          <a:p>
+            <a:r>
+              <a:t>B</a:t>
+            </a:r>
+          </a:p>
+          <a:p>
+            <a:r>
+              <a:t>A mean customer_id</a:t>
+            </a:r>
+          </a:p>
+          <a:p>
+            <a:r>
+              <a:t>It is an identifier that happens to be stored as a number. describe() computes statistics on anything numeric and cannot tell an identifier from a measurement. The judgement is yours.</a:t>
+            </a:r>
+          </a:p>
+          <a:p>
+            <a:r>
+              <a:t>C</a:t>
+            </a:r>
+          </a:p>
+          <a:p>
+            <a:r>
+              <a:t>Why the missing-value count is not optional</a:t>
+            </a:r>
+          </a:p>
+          <a:p>
+            <a:r>
+              <a:t>Because a blank is not a zero, and every count, average and join downstream behaves differently depending on how many there are. Here it is 172 rows worth UGX 390,632,335.</a:t>
+            </a:r>
+          </a:p>
+          <a:p>
+            <a:r>
+              <a:t>Let learners attempt first; use this to explain the reasoning, not just reveal the answer.</a:t>
+            </a:r>
+          </a:p>
+          <a:p>
+            <a:r>
+              <a:t/>
+            </a:r>
+          </a:p>
+          <a:p>
+            <a:r>
+              <a:t>TYPE NUANCE</a:t>
+            </a:r>
+          </a:p>
+          <a:p>
+            <a:r>
+              <a:t>An object dtype alone does not prove that a column contains bad numeric values; it can hold Python objects, including numbers. Inspect values and conversion results. Missing values may display as NaN, None, NaT or pandas NA depending on dtype.</a:t>
+            </a:r>
+          </a:p>
+          <a:p>
+            <a:r>
+              <a:t/>
+            </a:r>
+          </a:p>
+          <a:p>
+            <a:r>
+              <a:t>NEXT</a:t>
+            </a:r>
+          </a:p>
+          <a:p>
+            <a:r>
+              <a:t>How did you do?. Move on after a learner can explain the current example or required action.</a:t>
             </a:r>
           </a:p>
         </p:txBody>
@@ -1159,8 +2199,8 @@
 </p:notes>
 </file>
 
-<file path=ppt/notesSlides/notesSlide19.xml><?xml version="1.0" encoding="utf-8"?>
-<p:notes xmlns:a="http://schemas.openxmlformats.org/drawingml/2006/main" xmlns:p="http://schemas.openxmlformats.org/presentationml/2006/main" xmlns:r="http://schemas.openxmlformats.org/officeDocument/2006/relationships">
+<file path=ppt/notesSlides/notesSlide17.xml><?xml version="1.0" encoding="utf-8"?>
+<p:notes xmlns:a="http://schemas.openxmlformats.org/drawingml/2006/main" xmlns:p="http://schemas.openxmlformats.org/presentationml/2006/main">
   <p:cSld>
     <p:spTree>
       <p:nvGrpSpPr>
@@ -1202,7 +2242,106 @@
         <p:txBody>
           <a:bodyPr/>
           <a:lstStyle/>
-          <a:p/>
+          <a:p>
+            <a:r>
+              <a:t>TEACHING PURPOSE</a:t>
+            </a:r>
+          </a:p>
+          <a:p>
+            <a:r>
+              <a:t>How did you do?</a:t>
+            </a:r>
+          </a:p>
+          <a:p>
+            <a:r>
+              <a:t/>
+            </a:r>
+          </a:p>
+          <a:p>
+            <a:r>
+              <a:t>CONNECT</a:t>
+            </a:r>
+          </a:p>
+          <a:p>
+            <a:r>
+              <a:t>Build on the preceding slide: Can you answer these?.</a:t>
+            </a:r>
+          </a:p>
+          <a:p>
+            <a:r>
+              <a:t/>
+            </a:r>
+          </a:p>
+          <a:p>
+            <a:r>
+              <a:t>EXPLAIN IN ORDINARY WORDS</a:t>
+            </a:r>
+          </a:p>
+          <a:p>
+            <a:r>
+              <a:t>Grain means what one row represents. A key identifies a row; a primary key may use more than one column. A join matches keys, and multiple matches can multiply rows.</a:t>
+            </a:r>
+          </a:p>
+          <a:p>
+            <a:r>
+              <a:t/>
+            </a:r>
+          </a:p>
+          <a:p>
+            <a:r>
+              <a:t>CHECK AND EXPECTED ANSWER</a:t>
+            </a:r>
+          </a:p>
+          <a:p>
+            <a:r>
+              <a:t>One order has two lines. After joining orders to lines, how many rows for it? Two. Summing a repeated order-level total would double-count.</a:t>
+            </a:r>
+          </a:p>
+          <a:p>
+            <a:r>
+              <a:t/>
+            </a:r>
+          </a:p>
+          <a:p>
+            <a:r>
+              <a:t>IF LEARNERS ARE STUCK</a:t>
+            </a:r>
+          </a:p>
+          <a:p>
+            <a:r>
+              <a:t>Write one example row from each table. Circle keys and trace each match. Aggregate to the intended grain and check counts and totals.</a:t>
+            </a:r>
+          </a:p>
+          <a:p>
+            <a:r>
+              <a:t/>
+            </a:r>
+          </a:p>
+          <a:p>
+            <a:r>
+              <a:t>TYPE NUANCE</a:t>
+            </a:r>
+          </a:p>
+          <a:p>
+            <a:r>
+              <a:t>An object dtype alone does not prove that a column contains bad numeric values; it can hold Python objects, including numbers. Inspect values and conversion results. Missing values may display as NaN, None, NaT or pandas NA depending on dtype.</a:t>
+            </a:r>
+          </a:p>
+          <a:p>
+            <a:r>
+              <a:t/>
+            </a:r>
+          </a:p>
+          <a:p>
+            <a:r>
+              <a:t>NEXT</a:t>
+            </a:r>
+          </a:p>
+          <a:p>
+            <a:r>
+              <a:t>Profile Online Retail II. Move on after a learner can explain the current example or required action.</a:t>
+            </a:r>
+          </a:p>
         </p:txBody>
       </p:sp>
       <p:sp>
@@ -1225,8 +2364,8 @@
 </p:notes>
 </file>
 
-<file path=ppt/notesSlides/notesSlide2.xml><?xml version="1.0" encoding="utf-8"?>
-<p:notes xmlns:a="http://schemas.openxmlformats.org/drawingml/2006/main" xmlns:p="http://schemas.openxmlformats.org/presentationml/2006/main" xmlns:r="http://schemas.openxmlformats.org/officeDocument/2006/relationships">
+<file path=ppt/notesSlides/notesSlide18.xml><?xml version="1.0" encoding="utf-8"?>
+<p:notes xmlns:a="http://schemas.openxmlformats.org/drawingml/2006/main" xmlns:p="http://schemas.openxmlformats.org/presentationml/2006/main">
   <p:cSld>
     <p:spTree>
       <p:nvGrpSpPr>
@@ -1270,7 +2409,132 @@
           <a:lstStyle/>
           <a:p>
             <a:r>
-              <a:t>Tonight is session 7 of twelve.</a:t>
+              <a:t>TEACHING PURPOSE</a:t>
+            </a:r>
+          </a:p>
+          <a:p>
+            <a:r>
+              <a:t>Profile Online Retail II</a:t>
+            </a:r>
+          </a:p>
+          <a:p>
+            <a:r>
+              <a:t/>
+            </a:r>
+          </a:p>
+          <a:p>
+            <a:r>
+              <a:t>CONNECT</a:t>
+            </a:r>
+          </a:p>
+          <a:p>
+            <a:r>
+              <a:t>Build on the preceding slide: How did you do?.</a:t>
+            </a:r>
+          </a:p>
+          <a:p>
+            <a:r>
+              <a:t/>
+            </a:r>
+          </a:p>
+          <a:p>
+            <a:r>
+              <a:t>LECTURER CUE</a:t>
+            </a:r>
+          </a:p>
+          <a:p>
+            <a:r>
+              <a:t>Download it, open it in pandas, and produce the one-page profile. You are not cleaning it tonight. The goal is to be able to say, in three sentences, what the file is a record of and what it cannot tell you.</a:t>
+            </a:r>
+          </a:p>
+          <a:p>
+            <a:r>
+              <a:t/>
+            </a:r>
+          </a:p>
+          <a:p>
+            <a:r>
+              <a:t>EXPLAIN IN ORDINARY WORDS</a:t>
+            </a:r>
+          </a:p>
+          <a:p>
+            <a:r>
+              <a:t>Missing means not recorded, not automatically zero. Decide why it is missing and document the rule. Fitted fill values must come from training data when evaluating a model.</a:t>
+            </a:r>
+          </a:p>
+          <a:p>
+            <a:r>
+              <a:t/>
+            </a:r>
+          </a:p>
+          <a:p>
+            <a:r>
+              <a:t>CHECK AND EXPECTED ANSWER</a:t>
+            </a:r>
+          </a:p>
+          <a:p>
+            <a:r>
+              <a:t>Is an unrecorded energy reading evidence of zero consumption? No.</a:t>
+            </a:r>
+          </a:p>
+          <a:p>
+            <a:r>
+              <a:t/>
+            </a:r>
+          </a:p>
+          <a:p>
+            <a:r>
+              <a:t>IF LEARNERS ARE STUCK</a:t>
+            </a:r>
+          </a:p>
+          <a:p>
+            <a:r>
+              <a:t>Use three rows: a recorded zero, a recorded positive value and a blank. Explain their different meanings before cleaning.</a:t>
+            </a:r>
+          </a:p>
+          <a:p>
+            <a:r>
+              <a:t/>
+            </a:r>
+          </a:p>
+          <a:p>
+            <a:r>
+              <a:t>WORKBOOK CLARIFICATION</a:t>
+            </a:r>
+          </a:p>
+          <a:p>
+            <a:r>
+              <a:t>Do not say an Excel workbook cannot open solely because the combined row count exceeds one worksheet limit. Check its sheet names. pandas.read_excel uses the first sheet by default; sheet_name=None returns a dictionary of all sheets. Select or combine compatible sheets deliberately and check the resulting date range. Source: https://pandas.pydata.org/docs/reference/api/pandas.read_excel.html</a:t>
+            </a:r>
+          </a:p>
+          <a:p>
+            <a:r>
+              <a:t/>
+            </a:r>
+          </a:p>
+          <a:p>
+            <a:r>
+              <a:t>TYPE NUANCE</a:t>
+            </a:r>
+          </a:p>
+          <a:p>
+            <a:r>
+              <a:t>An object dtype alone does not prove that a column contains bad numeric values; it can hold Python objects, including numbers. Inspect values and conversion results. Missing values may display as NaN, None, NaT or pandas NA depending on dtype.</a:t>
+            </a:r>
+          </a:p>
+          <a:p>
+            <a:r>
+              <a:t/>
+            </a:r>
+          </a:p>
+          <a:p>
+            <a:r>
+              <a:t>NEXT</a:t>
+            </a:r>
+          </a:p>
+          <a:p>
+            <a:r>
+              <a:t>What you can do now. Move on after a learner can explain the current example or required action.</a:t>
             </a:r>
           </a:p>
         </p:txBody>
@@ -1295,8 +2559,8 @@
 </p:notes>
 </file>
 
-<file path=ppt/notesSlides/notesSlide20.xml><?xml version="1.0" encoding="utf-8"?>
-<p:notes xmlns:a="http://schemas.openxmlformats.org/drawingml/2006/main" xmlns:p="http://schemas.openxmlformats.org/presentationml/2006/main" xmlns:r="http://schemas.openxmlformats.org/officeDocument/2006/relationships">
+<file path=ppt/notesSlides/notesSlide19.xml><?xml version="1.0" encoding="utf-8"?>
+<p:notes xmlns:a="http://schemas.openxmlformats.org/drawingml/2006/main" xmlns:p="http://schemas.openxmlformats.org/presentationml/2006/main">
   <p:cSld>
     <p:spTree>
       <p:nvGrpSpPr>
@@ -1340,7 +2604,102 @@
           <a:lstStyle/>
           <a:p>
             <a:r>
-              <a:t>Profile a file from your own work, or a second sheet of the retail file, and write the three sentences. The sentences are harder than the code and they are the point.</a:t>
+              <a:t>TEACHING PURPOSE</a:t>
+            </a:r>
+          </a:p>
+          <a:p>
+            <a:r>
+              <a:t>What you can do now</a:t>
+            </a:r>
+          </a:p>
+          <a:p>
+            <a:r>
+              <a:t/>
+            </a:r>
+          </a:p>
+          <a:p>
+            <a:r>
+              <a:t>CONNECT</a:t>
+            </a:r>
+          </a:p>
+          <a:p>
+            <a:r>
+              <a:t>Build on the preceding slide: Profile Online Retail II.</a:t>
+            </a:r>
+          </a:p>
+          <a:p>
+            <a:r>
+              <a:t/>
+            </a:r>
+          </a:p>
+          <a:p>
+            <a:r>
+              <a:t>EXPLAIN IN ORDINARY WORDS</a:t>
+            </a:r>
+          </a:p>
+          <a:p>
+            <a:r>
+              <a:t>A DataFrame is a labelled table. A Series is a single labelled sequence, often one column. A dtype describes stored values, but the import may infer something unsuitable.</a:t>
+            </a:r>
+          </a:p>
+          <a:p>
+            <a:r>
+              <a:t/>
+            </a:r>
+          </a:p>
+          <a:p>
+            <a:r>
+              <a:t>CHECK AND EXPECTED ANSWER</a:t>
+            </a:r>
+          </a:p>
+          <a:p>
+            <a:r>
+              <a:t>Does a price that looks numeric prove the column is numeric? No. Inspect its dtype and troublesome values before conversion.</a:t>
+            </a:r>
+          </a:p>
+          <a:p>
+            <a:r>
+              <a:t/>
+            </a:r>
+          </a:p>
+          <a:p>
+            <a:r>
+              <a:t>IF LEARNERS ARE STUCK</a:t>
+            </a:r>
+          </a:p>
+          <a:p>
+            <a:r>
+              <a:t>Use head, shape and dtypes to locate the table, count rows/columns and inspect storage. Check units and missing values before calculating.</a:t>
+            </a:r>
+          </a:p>
+          <a:p>
+            <a:r>
+              <a:t/>
+            </a:r>
+          </a:p>
+          <a:p>
+            <a:r>
+              <a:t>TYPE NUANCE</a:t>
+            </a:r>
+          </a:p>
+          <a:p>
+            <a:r>
+              <a:t>An object dtype alone does not prove that a column contains bad numeric values; it can hold Python objects, including numbers. Inspect values and conversion results. Missing values may display as NaN, None, NaT or pandas NA depending on dtype.</a:t>
+            </a:r>
+          </a:p>
+          <a:p>
+            <a:r>
+              <a:t/>
+            </a:r>
+          </a:p>
+          <a:p>
+            <a:r>
+              <a:t>NEXT</a:t>
+            </a:r>
+          </a:p>
+          <a:p>
+            <a:r>
+              <a:t>Before the next session. Move on after a learner can explain the current example or required action.</a:t>
             </a:r>
           </a:p>
         </p:txBody>
@@ -1365,8 +2724,8 @@
 </p:notes>
 </file>
 
-<file path=ppt/notesSlides/notesSlide21.xml><?xml version="1.0" encoding="utf-8"?>
-<p:notes xmlns:a="http://schemas.openxmlformats.org/drawingml/2006/main" xmlns:p="http://schemas.openxmlformats.org/presentationml/2006/main" xmlns:r="http://schemas.openxmlformats.org/officeDocument/2006/relationships">
+<file path=ppt/notesSlides/notesSlide2.xml><?xml version="1.0" encoding="utf-8"?>
+<p:notes xmlns:a="http://schemas.openxmlformats.org/drawingml/2006/main" xmlns:p="http://schemas.openxmlformats.org/presentationml/2006/main">
   <p:cSld>
     <p:spTree>
       <p:nvGrpSpPr>
@@ -1410,7 +2769,102 @@
           <a:lstStyle/>
           <a:p>
             <a:r>
-              <a:t>Six commands, two minutes. Every hour lost in this work is lost to an assumption about a file that nobody checked, and the check is cheaper than the assumption every single time.</a:t>
+              <a:t>TEACHING PURPOSE</a:t>
+            </a:r>
+          </a:p>
+          <a:p>
+            <a:r>
+              <a:t>Where tonight sits</a:t>
+            </a:r>
+          </a:p>
+          <a:p>
+            <a:r>
+              <a:t/>
+            </a:r>
+          </a:p>
+          <a:p>
+            <a:r>
+              <a:t>CONNECT</a:t>
+            </a:r>
+          </a:p>
+          <a:p>
+            <a:r>
+              <a:t>Build on the preceding slide: Reading a file, and looking at it.</a:t>
+            </a:r>
+          </a:p>
+          <a:p>
+            <a:r>
+              <a:t/>
+            </a:r>
+          </a:p>
+          <a:p>
+            <a:r>
+              <a:t>LECTURER CUE</a:t>
+            </a:r>
+          </a:p>
+          <a:p>
+            <a:r>
+              <a:t>Tonight is session 7 of fifteen.</a:t>
+            </a:r>
+          </a:p>
+          <a:p>
+            <a:r>
+              <a:t/>
+            </a:r>
+          </a:p>
+          <a:p>
+            <a:r>
+              <a:t>EXPLAIN IN ORDINARY WORDS</a:t>
+            </a:r>
+          </a:p>
+          <a:p>
+            <a:r>
+              <a:t>Grain means what one row represents. A key identifies a row; a primary key may use more than one column. A join matches keys, and multiple matches can multiply rows.</a:t>
+            </a:r>
+          </a:p>
+          <a:p>
+            <a:r>
+              <a:t/>
+            </a:r>
+          </a:p>
+          <a:p>
+            <a:r>
+              <a:t>CHECK AND EXPECTED ANSWER</a:t>
+            </a:r>
+          </a:p>
+          <a:p>
+            <a:r>
+              <a:t>One order has two lines. After joining orders to lines, how many rows for it? Two. Summing a repeated order-level total would double-count.</a:t>
+            </a:r>
+          </a:p>
+          <a:p>
+            <a:r>
+              <a:t/>
+            </a:r>
+          </a:p>
+          <a:p>
+            <a:r>
+              <a:t>IF LEARNERS ARE STUCK</a:t>
+            </a:r>
+          </a:p>
+          <a:p>
+            <a:r>
+              <a:t>Write one example row from each table. Circle keys and trace each match. Aggregate to the intended grain and check counts and totals.</a:t>
+            </a:r>
+          </a:p>
+          <a:p>
+            <a:r>
+              <a:t/>
+            </a:r>
+          </a:p>
+          <a:p>
+            <a:r>
+              <a:t>NEXT</a:t>
+            </a:r>
+          </a:p>
+          <a:p>
+            <a:r>
+              <a:t>The words for tonight. Move on after a learner can explain the current example or required action.</a:t>
             </a:r>
           </a:p>
         </p:txBody>
@@ -1435,8 +2889,8 @@
 </p:notes>
 </file>
 
-<file path=ppt/notesSlides/notesSlide3.xml><?xml version="1.0" encoding="utf-8"?>
-<p:notes xmlns:a="http://schemas.openxmlformats.org/drawingml/2006/main" xmlns:p="http://schemas.openxmlformats.org/presentationml/2006/main" xmlns:r="http://schemas.openxmlformats.org/officeDocument/2006/relationships">
+<file path=ppt/notesSlides/notesSlide20.xml><?xml version="1.0" encoding="utf-8"?>
+<p:notes xmlns:a="http://schemas.openxmlformats.org/drawingml/2006/main" xmlns:p="http://schemas.openxmlformats.org/presentationml/2006/main">
   <p:cSld>
     <p:spTree>
       <p:nvGrpSpPr>
@@ -1478,7 +2932,61 @@
         <p:txBody>
           <a:bodyPr/>
           <a:lstStyle/>
-          <a:p/>
+          <a:p>
+            <a:r>
+              <a:t>TEACHING PURPOSE</a:t>
+            </a:r>
+          </a:p>
+          <a:p>
+            <a:r>
+              <a:t>Before the next session</a:t>
+            </a:r>
+          </a:p>
+          <a:p>
+            <a:r>
+              <a:t/>
+            </a:r>
+          </a:p>
+          <a:p>
+            <a:r>
+              <a:t>CONNECT</a:t>
+            </a:r>
+          </a:p>
+          <a:p>
+            <a:r>
+              <a:t>Build on the preceding slide: What you can do now.</a:t>
+            </a:r>
+          </a:p>
+          <a:p>
+            <a:r>
+              <a:t/>
+            </a:r>
+          </a:p>
+          <a:p>
+            <a:r>
+              <a:t>LECTURER CUE</a:t>
+            </a:r>
+          </a:p>
+          <a:p>
+            <a:r>
+              <a:t>Profile a file from your own work, or a second sheet of the retail file, and write the three sentences. The sentences are harder than the code and they are the point.</a:t>
+            </a:r>
+          </a:p>
+          <a:p>
+            <a:r>
+              <a:t/>
+            </a:r>
+          </a:p>
+          <a:p>
+            <a:r>
+              <a:t>NEXT</a:t>
+            </a:r>
+          </a:p>
+          <a:p>
+            <a:r>
+              <a:t>Look before you compute. Move on after a learner can explain the current example or required action.</a:t>
+            </a:r>
+          </a:p>
         </p:txBody>
       </p:sp>
       <p:sp>
@@ -1501,8 +3009,8 @@
 </p:notes>
 </file>
 
-<file path=ppt/notesSlides/notesSlide4.xml><?xml version="1.0" encoding="utf-8"?>
-<p:notes xmlns:a="http://schemas.openxmlformats.org/drawingml/2006/main" xmlns:p="http://schemas.openxmlformats.org/presentationml/2006/main" xmlns:r="http://schemas.openxmlformats.org/officeDocument/2006/relationships">
+<file path=ppt/notesSlides/notesSlide21.xml><?xml version="1.0" encoding="utf-8"?>
+<p:notes xmlns:a="http://schemas.openxmlformats.org/drawingml/2006/main" xmlns:p="http://schemas.openxmlformats.org/presentationml/2006/main">
   <p:cSld>
     <p:spTree>
       <p:nvGrpSpPr>
@@ -1546,7 +3054,87 @@
           <a:lstStyle/>
           <a:p>
             <a:r>
-              <a:t>These three are what tonight is marked against, in the sense that the lab checks them.</a:t>
+              <a:t>TEACHING PURPOSE</a:t>
+            </a:r>
+          </a:p>
+          <a:p>
+            <a:r>
+              <a:t>Look before you compute</a:t>
+            </a:r>
+          </a:p>
+          <a:p>
+            <a:r>
+              <a:t/>
+            </a:r>
+          </a:p>
+          <a:p>
+            <a:r>
+              <a:t>CONNECT</a:t>
+            </a:r>
+          </a:p>
+          <a:p>
+            <a:r>
+              <a:t>Build on the preceding slide: Before the next session.</a:t>
+            </a:r>
+          </a:p>
+          <a:p>
+            <a:r>
+              <a:t/>
+            </a:r>
+          </a:p>
+          <a:p>
+            <a:r>
+              <a:t>LECTURER CUE</a:t>
+            </a:r>
+          </a:p>
+          <a:p>
+            <a:r>
+              <a:t>Six commands, two minutes. Every hour lost in this work is lost to an assumption about a file that nobody checked, and the check is cheaper than the assumption every single time.</a:t>
+            </a:r>
+          </a:p>
+          <a:p>
+            <a:r>
+              <a:t/>
+            </a:r>
+          </a:p>
+          <a:p>
+            <a:r>
+              <a:t>EXPLAIN IN ORDINARY WORDS</a:t>
+            </a:r>
+          </a:p>
+          <a:p>
+            <a:r>
+              <a:t>A cleaning decision needs evidence, a stated rule and a before/after check. Similar rows may be genuine repeated events. Reconciliation compares totals built under the same definitions.</a:t>
+            </a:r>
+          </a:p>
+          <a:p>
+            <a:r>
+              <a:t/>
+            </a:r>
+          </a:p>
+          <a:p>
+            <a:r>
+              <a:t>CHECK AND EXPECTED ANSWER</a:t>
+            </a:r>
+          </a:p>
+          <a:p>
+            <a:r>
+              <a:t>May we delete every repeated amount? No. Check the row identifier and the table grain first.</a:t>
+            </a:r>
+          </a:p>
+          <a:p>
+            <a:r>
+              <a:t/>
+            </a:r>
+          </a:p>
+          <a:p>
+            <a:r>
+              <a:t>IF LEARNERS ARE STUCK</a:t>
+            </a:r>
+          </a:p>
+          <a:p>
+            <a:r>
+              <a:t>Keep raw data, record counts before and after each action, then explain any remaining difference instead of forcing totals to agree.</a:t>
             </a:r>
           </a:p>
         </p:txBody>
@@ -1571,8 +3159,8 @@
 </p:notes>
 </file>
 
-<file path=ppt/notesSlides/notesSlide5.xml><?xml version="1.0" encoding="utf-8"?>
-<p:notes xmlns:a="http://schemas.openxmlformats.org/drawingml/2006/main" xmlns:p="http://schemas.openxmlformats.org/presentationml/2006/main" xmlns:r="http://schemas.openxmlformats.org/officeDocument/2006/relationships">
+<file path=ppt/notesSlides/notesSlide3.xml><?xml version="1.0" encoding="utf-8"?>
+<p:notes xmlns:a="http://schemas.openxmlformats.org/drawingml/2006/main" xmlns:p="http://schemas.openxmlformats.org/presentationml/2006/main">
   <p:cSld>
     <p:spTree>
       <p:nvGrpSpPr>
@@ -1616,7 +3204,102 @@
           <a:lstStyle/>
           <a:p>
             <a:r>
-              <a:t>The same six commands, in the same order, every time. It is the cheapest habit in this work.</a:t>
+              <a:t>TEACHING PURPOSE</a:t>
+            </a:r>
+          </a:p>
+          <a:p>
+            <a:r>
+              <a:t>The words for tonight</a:t>
+            </a:r>
+          </a:p>
+          <a:p>
+            <a:r>
+              <a:t/>
+            </a:r>
+          </a:p>
+          <a:p>
+            <a:r>
+              <a:t>CONNECT</a:t>
+            </a:r>
+          </a:p>
+          <a:p>
+            <a:r>
+              <a:t>Build on the preceding slide: Where tonight sits.</a:t>
+            </a:r>
+          </a:p>
+          <a:p>
+            <a:r>
+              <a:t/>
+            </a:r>
+          </a:p>
+          <a:p>
+            <a:r>
+              <a:t>EXPLAIN IN ORDINARY WORDS</a:t>
+            </a:r>
+          </a:p>
+          <a:p>
+            <a:r>
+              <a:t>Missing means not recorded, not automatically zero. Decide why it is missing and document the rule. Fitted fill values must come from training data when evaluating a model.</a:t>
+            </a:r>
+          </a:p>
+          <a:p>
+            <a:r>
+              <a:t/>
+            </a:r>
+          </a:p>
+          <a:p>
+            <a:r>
+              <a:t>CHECK AND EXPECTED ANSWER</a:t>
+            </a:r>
+          </a:p>
+          <a:p>
+            <a:r>
+              <a:t>Is an unrecorded energy reading evidence of zero consumption? No.</a:t>
+            </a:r>
+          </a:p>
+          <a:p>
+            <a:r>
+              <a:t/>
+            </a:r>
+          </a:p>
+          <a:p>
+            <a:r>
+              <a:t>IF LEARNERS ARE STUCK</a:t>
+            </a:r>
+          </a:p>
+          <a:p>
+            <a:r>
+              <a:t>Use three rows: a recorded zero, a recorded positive value and a blank. Explain their different meanings before cleaning.</a:t>
+            </a:r>
+          </a:p>
+          <a:p>
+            <a:r>
+              <a:t/>
+            </a:r>
+          </a:p>
+          <a:p>
+            <a:r>
+              <a:t>TYPE NUANCE</a:t>
+            </a:r>
+          </a:p>
+          <a:p>
+            <a:r>
+              <a:t>An object dtype alone does not prove that a column contains bad numeric values; it can hold Python objects, including numbers. Inspect values and conversion results. Missing values may display as NaN, None, NaT or pandas NA depending on dtype.</a:t>
+            </a:r>
+          </a:p>
+          <a:p>
+            <a:r>
+              <a:t/>
+            </a:r>
+          </a:p>
+          <a:p>
+            <a:r>
+              <a:t>NEXT</a:t>
+            </a:r>
+          </a:p>
+          <a:p>
+            <a:r>
+              <a:t>By the end of tonight you can…. Move on after a learner can explain the current example or required action.</a:t>
             </a:r>
           </a:p>
         </p:txBody>
@@ -1641,8 +3324,8 @@
 </p:notes>
 </file>
 
-<file path=ppt/notesSlides/notesSlide6.xml><?xml version="1.0" encoding="utf-8"?>
-<p:notes xmlns:a="http://schemas.openxmlformats.org/drawingml/2006/main" xmlns:p="http://schemas.openxmlformats.org/presentationml/2006/main" xmlns:r="http://schemas.openxmlformats.org/officeDocument/2006/relationships">
+<file path=ppt/notesSlides/notesSlide4.xml><?xml version="1.0" encoding="utf-8"?>
+<p:notes xmlns:a="http://schemas.openxmlformats.org/drawingml/2006/main" xmlns:p="http://schemas.openxmlformats.org/presentationml/2006/main">
   <p:cSld>
     <p:spTree>
       <p:nvGrpSpPr>
@@ -1686,7 +3369,117 @@
           <a:lstStyle/>
           <a:p>
             <a:r>
-              <a:t>One column of a DataFrame, on its own. Selecting a single column gives you one of these rather than a table.</a:t>
+              <a:t>TEACHING PURPOSE</a:t>
+            </a:r>
+          </a:p>
+          <a:p>
+            <a:r>
+              <a:t>By the end of tonight you can…</a:t>
+            </a:r>
+          </a:p>
+          <a:p>
+            <a:r>
+              <a:t/>
+            </a:r>
+          </a:p>
+          <a:p>
+            <a:r>
+              <a:t>CONNECT</a:t>
+            </a:r>
+          </a:p>
+          <a:p>
+            <a:r>
+              <a:t>Build on the preceding slide: The words for tonight.</a:t>
+            </a:r>
+          </a:p>
+          <a:p>
+            <a:r>
+              <a:t/>
+            </a:r>
+          </a:p>
+          <a:p>
+            <a:r>
+              <a:t>LECTURER CUE</a:t>
+            </a:r>
+          </a:p>
+          <a:p>
+            <a:r>
+              <a:t>These three are what tonight is marked against, in the sense that the lab checks them.</a:t>
+            </a:r>
+          </a:p>
+          <a:p>
+            <a:r>
+              <a:t/>
+            </a:r>
+          </a:p>
+          <a:p>
+            <a:r>
+              <a:t>EXPLAIN IN ORDINARY WORDS</a:t>
+            </a:r>
+          </a:p>
+          <a:p>
+            <a:r>
+              <a:t>A DataFrame is a labelled table. A Series is a single labelled sequence, often one column. A dtype describes stored values, but the import may infer something unsuitable.</a:t>
+            </a:r>
+          </a:p>
+          <a:p>
+            <a:r>
+              <a:t/>
+            </a:r>
+          </a:p>
+          <a:p>
+            <a:r>
+              <a:t>CHECK AND EXPECTED ANSWER</a:t>
+            </a:r>
+          </a:p>
+          <a:p>
+            <a:r>
+              <a:t>Does a price that looks numeric prove the column is numeric? No. Inspect its dtype and troublesome values before conversion.</a:t>
+            </a:r>
+          </a:p>
+          <a:p>
+            <a:r>
+              <a:t/>
+            </a:r>
+          </a:p>
+          <a:p>
+            <a:r>
+              <a:t>IF LEARNERS ARE STUCK</a:t>
+            </a:r>
+          </a:p>
+          <a:p>
+            <a:r>
+              <a:t>Use head, shape and dtypes to locate the table, count rows/columns and inspect storage. Check units and missing values before calculating.</a:t>
+            </a:r>
+          </a:p>
+          <a:p>
+            <a:r>
+              <a:t/>
+            </a:r>
+          </a:p>
+          <a:p>
+            <a:r>
+              <a:t>TYPE NUANCE</a:t>
+            </a:r>
+          </a:p>
+          <a:p>
+            <a:r>
+              <a:t>An object dtype alone does not prove that a column contains bad numeric values; it can hold Python objects, including numbers. Inspect values and conversion results. Missing values may display as NaN, None, NaT or pandas NA depending on dtype.</a:t>
+            </a:r>
+          </a:p>
+          <a:p>
+            <a:r>
+              <a:t/>
+            </a:r>
+          </a:p>
+          <a:p>
+            <a:r>
+              <a:t>NEXT</a:t>
+            </a:r>
+          </a:p>
+          <a:p>
+            <a:r>
+              <a:t>Somebody sends you a file you have never seen.. Move on after a learner can explain the current example or required action.</a:t>
             </a:r>
           </a:p>
         </p:txBody>
@@ -1711,8 +3504,8 @@
 </p:notes>
 </file>
 
-<file path=ppt/notesSlides/notesSlide7.xml><?xml version="1.0" encoding="utf-8"?>
-<p:notes xmlns:a="http://schemas.openxmlformats.org/drawingml/2006/main" xmlns:p="http://schemas.openxmlformats.org/presentationml/2006/main" xmlns:r="http://schemas.openxmlformats.org/officeDocument/2006/relationships">
+<file path=ppt/notesSlides/notesSlide5.xml><?xml version="1.0" encoding="utf-8"?>
+<p:notes xmlns:a="http://schemas.openxmlformats.org/drawingml/2006/main" xmlns:p="http://schemas.openxmlformats.org/presentationml/2006/main">
   <p:cSld>
     <p:spTree>
       <p:nvGrpSpPr>
@@ -1756,7 +3549,117 @@
           <a:lstStyle/>
           <a:p>
             <a:r>
-              <a:t>The type pandas decided a column has when it read the file. You did not choose it and it is not always right.</a:t>
+              <a:t>TEACHING PURPOSE</a:t>
+            </a:r>
+          </a:p>
+          <a:p>
+            <a:r>
+              <a:t>Somebody sends you a file you have never seen.</a:t>
+            </a:r>
+          </a:p>
+          <a:p>
+            <a:r>
+              <a:t/>
+            </a:r>
+          </a:p>
+          <a:p>
+            <a:r>
+              <a:t>CONNECT</a:t>
+            </a:r>
+          </a:p>
+          <a:p>
+            <a:r>
+              <a:t>Build on the preceding slide: By the end of tonight you can….</a:t>
+            </a:r>
+          </a:p>
+          <a:p>
+            <a:r>
+              <a:t/>
+            </a:r>
+          </a:p>
+          <a:p>
+            <a:r>
+              <a:t>LECTURER CUE</a:t>
+            </a:r>
+          </a:p>
+          <a:p>
+            <a:r>
+              <a:t>The same six commands, in the same order, every time. It is the cheapest habit in this work.</a:t>
+            </a:r>
+          </a:p>
+          <a:p>
+            <a:r>
+              <a:t/>
+            </a:r>
+          </a:p>
+          <a:p>
+            <a:r>
+              <a:t>EXPLAIN IN ORDINARY WORDS</a:t>
+            </a:r>
+          </a:p>
+          <a:p>
+            <a:r>
+              <a:t>An observation describes the data. A finding answers a defined question with evidence. A recommendation adds an action, its justification and limits.</a:t>
+            </a:r>
+          </a:p>
+          <a:p>
+            <a:r>
+              <a:t/>
+            </a:r>
+          </a:p>
+          <a:p>
+            <a:r>
+              <a:t>CHECK AND EXPECTED ANSWER</a:t>
+            </a:r>
+          </a:p>
+          <a:p>
+            <a:r>
+              <a:t>Does a difference between two groups prove one caused the other? No. Other differences or selection may explain it.</a:t>
+            </a:r>
+          </a:p>
+          <a:p>
+            <a:r>
+              <a:t/>
+            </a:r>
+          </a:p>
+          <a:p>
+            <a:r>
+              <a:t>IF LEARNERS ARE STUCK</a:t>
+            </a:r>
+          </a:p>
+          <a:p>
+            <a:r>
+              <a:t>Ask for the population, time period, number and comparison. Then ask what additional evidence could change the recommendation.</a:t>
+            </a:r>
+          </a:p>
+          <a:p>
+            <a:r>
+              <a:t/>
+            </a:r>
+          </a:p>
+          <a:p>
+            <a:r>
+              <a:t>WORKBOOK CLARIFICATION</a:t>
+            </a:r>
+          </a:p>
+          <a:p>
+            <a:r>
+              <a:t>Do not say an Excel workbook cannot open solely because the combined row count exceeds one worksheet limit. Check its sheet names. pandas.read_excel uses the first sheet by default; sheet_name=None returns a dictionary of all sheets. Select or combine compatible sheets deliberately and check the resulting date range. Source: https://pandas.pydata.org/docs/reference/api/pandas.read_excel.html</a:t>
+            </a:r>
+          </a:p>
+          <a:p>
+            <a:r>
+              <a:t/>
+            </a:r>
+          </a:p>
+          <a:p>
+            <a:r>
+              <a:t>NEXT</a:t>
+            </a:r>
+          </a:p>
+          <a:p>
+            <a:r>
+              <a:t>Six commands, on any file you have never seen. Move on after a learner can explain the current example or required action.</a:t>
             </a:r>
           </a:p>
         </p:txBody>
@@ -1781,8 +3684,8 @@
 </p:notes>
 </file>
 
-<file path=ppt/notesSlides/notesSlide8.xml><?xml version="1.0" encoding="utf-8"?>
-<p:notes xmlns:a="http://schemas.openxmlformats.org/drawingml/2006/main" xmlns:p="http://schemas.openxmlformats.org/presentationml/2006/main" xmlns:r="http://schemas.openxmlformats.org/officeDocument/2006/relationships">
+<file path=ppt/notesSlides/notesSlide6.xml><?xml version="1.0" encoding="utf-8"?>
+<p:notes xmlns:a="http://schemas.openxmlformats.org/drawingml/2006/main" xmlns:p="http://schemas.openxmlformats.org/presentationml/2006/main">
   <p:cSld>
     <p:spTree>
       <p:nvGrpSpPr>
@@ -1826,7 +3729,102 @@
           <a:lstStyle/>
           <a:p>
             <a:r>
-              <a:t>A cell with nothing recorded. pandas shows it as NaN, which stands for not a number and appears in text columns too.</a:t>
+              <a:t>TEACHING PURPOSE</a:t>
+            </a:r>
+          </a:p>
+          <a:p>
+            <a:r>
+              <a:t>Series</a:t>
+            </a:r>
+          </a:p>
+          <a:p>
+            <a:r>
+              <a:t/>
+            </a:r>
+          </a:p>
+          <a:p>
+            <a:r>
+              <a:t>CONNECT</a:t>
+            </a:r>
+          </a:p>
+          <a:p>
+            <a:r>
+              <a:t>Build on the preceding slide: Six commands, on any file you have never seen.</a:t>
+            </a:r>
+          </a:p>
+          <a:p>
+            <a:r>
+              <a:t/>
+            </a:r>
+          </a:p>
+          <a:p>
+            <a:r>
+              <a:t>LECTURER CUE</a:t>
+            </a:r>
+          </a:p>
+          <a:p>
+            <a:r>
+              <a:t>One column of a DataFrame, on its own. Selecting a single column gives you one of these rather than a table.</a:t>
+            </a:r>
+          </a:p>
+          <a:p>
+            <a:r>
+              <a:t/>
+            </a:r>
+          </a:p>
+          <a:p>
+            <a:r>
+              <a:t>EXPLAIN IN ORDINARY WORDS</a:t>
+            </a:r>
+          </a:p>
+          <a:p>
+            <a:r>
+              <a:t>A DataFrame is a labelled table. A Series is a single labelled sequence, often one column. A dtype describes stored values, but the import may infer something unsuitable.</a:t>
+            </a:r>
+          </a:p>
+          <a:p>
+            <a:r>
+              <a:t/>
+            </a:r>
+          </a:p>
+          <a:p>
+            <a:r>
+              <a:t>CHECK AND EXPECTED ANSWER</a:t>
+            </a:r>
+          </a:p>
+          <a:p>
+            <a:r>
+              <a:t>Does a price that looks numeric prove the column is numeric? No. Inspect its dtype and troublesome values before conversion.</a:t>
+            </a:r>
+          </a:p>
+          <a:p>
+            <a:r>
+              <a:t/>
+            </a:r>
+          </a:p>
+          <a:p>
+            <a:r>
+              <a:t>IF LEARNERS ARE STUCK</a:t>
+            </a:r>
+          </a:p>
+          <a:p>
+            <a:r>
+              <a:t>Use head, shape and dtypes to locate the table, count rows/columns and inspect storage. Check units and missing values before calculating.</a:t>
+            </a:r>
+          </a:p>
+          <a:p>
+            <a:r>
+              <a:t/>
+            </a:r>
+          </a:p>
+          <a:p>
+            <a:r>
+              <a:t>NEXT</a:t>
+            </a:r>
+          </a:p>
+          <a:p>
+            <a:r>
+              <a:t>dtype. Move on after a learner can explain the current example or required action.</a:t>
             </a:r>
           </a:p>
         </p:txBody>
@@ -1851,8 +3849,8 @@
 </p:notes>
 </file>
 
-<file path=ppt/notesSlides/notesSlide9.xml><?xml version="1.0" encoding="utf-8"?>
-<p:notes xmlns:a="http://schemas.openxmlformats.org/drawingml/2006/main" xmlns:p="http://schemas.openxmlformats.org/presentationml/2006/main" xmlns:r="http://schemas.openxmlformats.org/officeDocument/2006/relationships">
+<file path=ppt/notesSlides/notesSlide7.xml><?xml version="1.0" encoding="utf-8"?>
+<p:notes xmlns:a="http://schemas.openxmlformats.org/drawingml/2006/main" xmlns:p="http://schemas.openxmlformats.org/presentationml/2006/main">
   <p:cSld>
     <p:spTree>
       <p:nvGrpSpPr>
@@ -1894,7 +3892,451 @@
         <p:txBody>
           <a:bodyPr/>
           <a:lstStyle/>
-          <a:p/>
+          <a:p>
+            <a:r>
+              <a:t>TEACHING PURPOSE</a:t>
+            </a:r>
+          </a:p>
+          <a:p>
+            <a:r>
+              <a:t>dtype</a:t>
+            </a:r>
+          </a:p>
+          <a:p>
+            <a:r>
+              <a:t/>
+            </a:r>
+          </a:p>
+          <a:p>
+            <a:r>
+              <a:t>CONNECT</a:t>
+            </a:r>
+          </a:p>
+          <a:p>
+            <a:r>
+              <a:t>Build on the preceding slide: Series.</a:t>
+            </a:r>
+          </a:p>
+          <a:p>
+            <a:r>
+              <a:t/>
+            </a:r>
+          </a:p>
+          <a:p>
+            <a:r>
+              <a:t>LECTURER CUE</a:t>
+            </a:r>
+          </a:p>
+          <a:p>
+            <a:r>
+              <a:t>The type pandas decided a column has when it read the file. You did not choose it and it is not always right.</a:t>
+            </a:r>
+          </a:p>
+          <a:p>
+            <a:r>
+              <a:t/>
+            </a:r>
+          </a:p>
+          <a:p>
+            <a:r>
+              <a:t>EXPLAIN IN ORDINARY WORDS</a:t>
+            </a:r>
+          </a:p>
+          <a:p>
+            <a:r>
+              <a:t>A DataFrame is a labelled table. A Series is a single labelled sequence, often one column. A dtype describes stored values, but the import may infer something unsuitable.</a:t>
+            </a:r>
+          </a:p>
+          <a:p>
+            <a:r>
+              <a:t/>
+            </a:r>
+          </a:p>
+          <a:p>
+            <a:r>
+              <a:t>CHECK AND EXPECTED ANSWER</a:t>
+            </a:r>
+          </a:p>
+          <a:p>
+            <a:r>
+              <a:t>Does a price that looks numeric prove the column is numeric? No. Inspect its dtype and troublesome values before conversion.</a:t>
+            </a:r>
+          </a:p>
+          <a:p>
+            <a:r>
+              <a:t/>
+            </a:r>
+          </a:p>
+          <a:p>
+            <a:r>
+              <a:t>IF LEARNERS ARE STUCK</a:t>
+            </a:r>
+          </a:p>
+          <a:p>
+            <a:r>
+              <a:t>Use head, shape and dtypes to locate the table, count rows/columns and inspect storage. Check units and missing values before calculating.</a:t>
+            </a:r>
+          </a:p>
+          <a:p>
+            <a:r>
+              <a:t/>
+            </a:r>
+          </a:p>
+          <a:p>
+            <a:r>
+              <a:t>TYPE NUANCE</a:t>
+            </a:r>
+          </a:p>
+          <a:p>
+            <a:r>
+              <a:t>An object dtype alone does not prove that a column contains bad numeric values; it can hold Python objects, including numbers. Inspect values and conversion results. Missing values may display as NaN, None, NaT or pandas NA depending on dtype.</a:t>
+            </a:r>
+          </a:p>
+          <a:p>
+            <a:r>
+              <a:t/>
+            </a:r>
+          </a:p>
+          <a:p>
+            <a:r>
+              <a:t>NEXT</a:t>
+            </a:r>
+          </a:p>
+          <a:p>
+            <a:r>
+              <a:t>Missing value. Move on after a learner can explain the current example or required action.</a:t>
+            </a:r>
+          </a:p>
+        </p:txBody>
+      </p:sp>
+      <p:sp>
+        <p:nvSpPr>
+          <p:cNvPr id="4" name="Slide Number Placeholder 3"/>
+          <p:cNvSpPr>
+            <a:spLocks noGrp="1"/>
+          </p:cNvSpPr>
+          <p:nvPr>
+            <p:ph type="sldNum" idx="5" sz="quarter"/>
+          </p:nvPr>
+        </p:nvSpPr>
+        <p:spPr/>
+      </p:sp>
+    </p:spTree>
+  </p:cSld>
+  <p:clrMapOvr>
+    <a:masterClrMapping/>
+  </p:clrMapOvr>
+</p:notes>
+</file>
+
+<file path=ppt/notesSlides/notesSlide8.xml><?xml version="1.0" encoding="utf-8"?>
+<p:notes xmlns:a="http://schemas.openxmlformats.org/drawingml/2006/main" xmlns:p="http://schemas.openxmlformats.org/presentationml/2006/main">
+  <p:cSld>
+    <p:spTree>
+      <p:nvGrpSpPr>
+        <p:cNvPr id="1" name=""/>
+        <p:cNvGrpSpPr/>
+        <p:nvPr/>
+      </p:nvGrpSpPr>
+      <p:grpSpPr>
+        <a:xfrm>
+          <a:off x="0" y="0"/>
+          <a:ext cx="0" cy="0"/>
+          <a:chOff x="0" y="0"/>
+          <a:chExt cx="0" cy="0"/>
+        </a:xfrm>
+      </p:grpSpPr>
+      <p:sp>
+        <p:nvSpPr>
+          <p:cNvPr id="2" name="Slide Image Placeholder 1"/>
+          <p:cNvSpPr>
+            <a:spLocks noGrp="1"/>
+          </p:cNvSpPr>
+          <p:nvPr>
+            <p:ph type="sldImg" idx="2"/>
+          </p:nvPr>
+        </p:nvSpPr>
+        <p:spPr/>
+      </p:sp>
+      <p:sp>
+        <p:nvSpPr>
+          <p:cNvPr id="3" name="Notes Placeholder 2"/>
+          <p:cNvSpPr>
+            <a:spLocks noGrp="1"/>
+          </p:cNvSpPr>
+          <p:nvPr>
+            <p:ph type="body" idx="3" sz="quarter"/>
+          </p:nvPr>
+        </p:nvSpPr>
+        <p:spPr/>
+        <p:txBody>
+          <a:bodyPr/>
+          <a:lstStyle/>
+          <a:p>
+            <a:r>
+              <a:t>TEACHING PURPOSE</a:t>
+            </a:r>
+          </a:p>
+          <a:p>
+            <a:r>
+              <a:t>Missing value</a:t>
+            </a:r>
+          </a:p>
+          <a:p>
+            <a:r>
+              <a:t/>
+            </a:r>
+          </a:p>
+          <a:p>
+            <a:r>
+              <a:t>CONNECT</a:t>
+            </a:r>
+          </a:p>
+          <a:p>
+            <a:r>
+              <a:t>Build on the preceding slide: dtype.</a:t>
+            </a:r>
+          </a:p>
+          <a:p>
+            <a:r>
+              <a:t/>
+            </a:r>
+          </a:p>
+          <a:p>
+            <a:r>
+              <a:t>LECTURER CUE</a:t>
+            </a:r>
+          </a:p>
+          <a:p>
+            <a:r>
+              <a:t>A cell with nothing recorded. pandas shows it as NaN, which stands for not a number and appears in text columns too.</a:t>
+            </a:r>
+          </a:p>
+          <a:p>
+            <a:r>
+              <a:t/>
+            </a:r>
+          </a:p>
+          <a:p>
+            <a:r>
+              <a:t>EXPLAIN IN ORDINARY WORDS</a:t>
+            </a:r>
+          </a:p>
+          <a:p>
+            <a:r>
+              <a:t>Missing means not recorded, not automatically zero. Decide why it is missing and document the rule. Fitted fill values must come from training data when evaluating a model.</a:t>
+            </a:r>
+          </a:p>
+          <a:p>
+            <a:r>
+              <a:t/>
+            </a:r>
+          </a:p>
+          <a:p>
+            <a:r>
+              <a:t>CHECK AND EXPECTED ANSWER</a:t>
+            </a:r>
+          </a:p>
+          <a:p>
+            <a:r>
+              <a:t>Is an unrecorded energy reading evidence of zero consumption? No.</a:t>
+            </a:r>
+          </a:p>
+          <a:p>
+            <a:r>
+              <a:t/>
+            </a:r>
+          </a:p>
+          <a:p>
+            <a:r>
+              <a:t>IF LEARNERS ARE STUCK</a:t>
+            </a:r>
+          </a:p>
+          <a:p>
+            <a:r>
+              <a:t>Use three rows: a recorded zero, a recorded positive value and a blank. Explain their different meanings before cleaning.</a:t>
+            </a:r>
+          </a:p>
+          <a:p>
+            <a:r>
+              <a:t/>
+            </a:r>
+          </a:p>
+          <a:p>
+            <a:r>
+              <a:t>NEXT</a:t>
+            </a:r>
+          </a:p>
+          <a:p>
+            <a:r>
+              <a:t>The six commands. Learn the order, not the words.. Move on after a learner can explain the current example or required action.</a:t>
+            </a:r>
+          </a:p>
+        </p:txBody>
+      </p:sp>
+      <p:sp>
+        <p:nvSpPr>
+          <p:cNvPr id="4" name="Slide Number Placeholder 3"/>
+          <p:cNvSpPr>
+            <a:spLocks noGrp="1"/>
+          </p:cNvSpPr>
+          <p:nvPr>
+            <p:ph type="sldNum" idx="5" sz="quarter"/>
+          </p:nvPr>
+        </p:nvSpPr>
+        <p:spPr/>
+      </p:sp>
+    </p:spTree>
+  </p:cSld>
+  <p:clrMapOvr>
+    <a:masterClrMapping/>
+  </p:clrMapOvr>
+</p:notes>
+</file>
+
+<file path=ppt/notesSlides/notesSlide9.xml><?xml version="1.0" encoding="utf-8"?>
+<p:notes xmlns:a="http://schemas.openxmlformats.org/drawingml/2006/main" xmlns:p="http://schemas.openxmlformats.org/presentationml/2006/main">
+  <p:cSld>
+    <p:spTree>
+      <p:nvGrpSpPr>
+        <p:cNvPr id="1" name=""/>
+        <p:cNvGrpSpPr/>
+        <p:nvPr/>
+      </p:nvGrpSpPr>
+      <p:grpSpPr>
+        <a:xfrm>
+          <a:off x="0" y="0"/>
+          <a:ext cx="0" cy="0"/>
+          <a:chOff x="0" y="0"/>
+          <a:chExt cx="0" cy="0"/>
+        </a:xfrm>
+      </p:grpSpPr>
+      <p:sp>
+        <p:nvSpPr>
+          <p:cNvPr id="2" name="Slide Image Placeholder 1"/>
+          <p:cNvSpPr>
+            <a:spLocks noGrp="1"/>
+          </p:cNvSpPr>
+          <p:nvPr>
+            <p:ph type="sldImg" idx="2"/>
+          </p:nvPr>
+        </p:nvSpPr>
+        <p:spPr/>
+      </p:sp>
+      <p:sp>
+        <p:nvSpPr>
+          <p:cNvPr id="3" name="Notes Placeholder 2"/>
+          <p:cNvSpPr>
+            <a:spLocks noGrp="1"/>
+          </p:cNvSpPr>
+          <p:nvPr>
+            <p:ph type="body" idx="3" sz="quarter"/>
+          </p:nvPr>
+        </p:nvSpPr>
+        <p:spPr/>
+        <p:txBody>
+          <a:bodyPr/>
+          <a:lstStyle/>
+          <a:p>
+            <a:r>
+              <a:t>TEACHING PURPOSE</a:t>
+            </a:r>
+          </a:p>
+          <a:p>
+            <a:r>
+              <a:t>The six commands. Learn the order, not the words.</a:t>
+            </a:r>
+          </a:p>
+          <a:p>
+            <a:r>
+              <a:t/>
+            </a:r>
+          </a:p>
+          <a:p>
+            <a:r>
+              <a:t>CONNECT</a:t>
+            </a:r>
+          </a:p>
+          <a:p>
+            <a:r>
+              <a:t>Build on the preceding slide: Missing value.</a:t>
+            </a:r>
+          </a:p>
+          <a:p>
+            <a:r>
+              <a:t/>
+            </a:r>
+          </a:p>
+          <a:p>
+            <a:r>
+              <a:t>EXPLAIN IN ORDINARY WORDS</a:t>
+            </a:r>
+          </a:p>
+          <a:p>
+            <a:r>
+              <a:t>Cross-validation repeats training and validation on different partitions. Each fold gets a newly fitted model and preprocessing. Variation across fold scores shows sensitivity to the partition.</a:t>
+            </a:r>
+          </a:p>
+          <a:p>
+            <a:r>
+              <a:t/>
+            </a:r>
+          </a:p>
+          <a:p>
+            <a:r>
+              <a:t>CHECK AND EXPECTED ANSWER</a:t>
+            </a:r>
+          </a:p>
+          <a:p>
+            <a:r>
+              <a:t>May preprocessing learn from all rows before the folds? No, that would give each validation fold information from outside its training portion.</a:t>
+            </a:r>
+          </a:p>
+          <a:p>
+            <a:r>
+              <a:t/>
+            </a:r>
+          </a:p>
+          <a:p>
+            <a:r>
+              <a:t>IF LEARNERS ARE STUCK</a:t>
+            </a:r>
+          </a:p>
+          <a:p>
+            <a:r>
+              <a:t>Draw three small partitions and label who learns and who is evaluated. Fold spread is not automatically a confidence interval.</a:t>
+            </a:r>
+          </a:p>
+          <a:p>
+            <a:r>
+              <a:t/>
+            </a:r>
+          </a:p>
+          <a:p>
+            <a:r>
+              <a:t>TYPE NUANCE</a:t>
+            </a:r>
+          </a:p>
+          <a:p>
+            <a:r>
+              <a:t>An object dtype alone does not prove that a column contains bad numeric values; it can hold Python objects, including numbers. Inspect values and conversion results. Missing values may display as NaN, None, NaT or pandas NA depending on dtype.</a:t>
+            </a:r>
+          </a:p>
+          <a:p>
+            <a:r>
+              <a:t/>
+            </a:r>
+          </a:p>
+          <a:p>
+            <a:r>
+              <a:t>NEXT</a:t>
+            </a:r>
+          </a:p>
+          <a:p>
+            <a:r>
+              <a:t>Break. Move on after a learner can explain the current example or required action.</a:t>
+            </a:r>
+          </a:p>
         </p:txBody>
       </p:sp>
       <p:sp>
@@ -5997,7 +8439,7 @@
                 </a:solidFill>
                 <a:latin typeface="Calibri"/>
               </a:rPr>
-              <a:t>Selecting and filtering: one column, several columns, rows by condition, then two conditions and the brackets that are not optional. Then the failure everybody meets: a price column that arrived as text, and the sum that</a:t>
+              <a:t>Selecting and filtering: one column, several columns, rows by condition, then two conditions and the brackets that are not optional.</a:t>
             </a:r>
           </a:p>
         </p:txBody>
@@ -8142,7 +10584,7 @@
 </file>
 
 <file path=ppt/slides/slide16.xml><?xml version="1.0" encoding="utf-8"?>
-<p:sld xmlns:a="http://schemas.openxmlformats.org/drawingml/2006/main" xmlns:p="http://schemas.openxmlformats.org/presentationml/2006/main" xmlns:r="http://schemas.openxmlformats.org/officeDocument/2006/relationships">
+<p:sld xmlns:a="http://schemas.openxmlformats.org/drawingml/2006/main" xmlns:p="http://schemas.openxmlformats.org/presentationml/2006/main">
   <p:cSld>
     <p:spTree>
       <p:nvGrpSpPr>
@@ -8227,7 +10669,7 @@
                 </a:solidFill>
                 <a:latin typeface="Cambria"/>
               </a:rPr>
-              <a:t>Tonight's file will not open in Excel</a:t>
+              <a:t>A large workbook to inspect with pandas</a:t>
             </a:r>
           </a:p>
         </p:txBody>
@@ -8392,7 +10834,7 @@
                 </a:solidFill>
                 <a:latin typeface="Calibri"/>
               </a:rPr>
-              <a:t>Excel stops at 1,048,576 rows. This file has more than that, which means tonight is the first time the new tool does something the old one cannot.</a:t>
+              <a:t>A worksheet has a row limit. This workbook spans sheets; inspect all sheets before combining them. pandas makes the preparation repeatable.</a:t>
             </a:r>
           </a:p>
         </p:txBody>
@@ -8801,7 +11243,7 @@
         <p:spPr>
           <a:xfrm>
             <a:off x="685800" y="1600200"/>
-            <a:ext cx="10820095" cy="1604837"/>
+            <a:ext cx="10820095" cy="2107757"/>
           </a:xfrm>
           <a:prstGeom prst="rect">
             <a:avLst/>
@@ -8842,7 +11284,7 @@
         </p:nvSpPr>
         <p:spPr>
           <a:xfrm>
-            <a:off x="685800" y="3296477"/>
+            <a:off x="685800" y="3982277"/>
             <a:ext cx="10820095" cy="457200"/>
           </a:xfrm>
           <a:prstGeom prst="rect">
@@ -11948,7 +14390,7 @@
         <p:spPr>
           <a:xfrm>
             <a:off x="685800" y="1911095"/>
-            <a:ext cx="10820095" cy="969264"/>
+            <a:ext cx="10820095" cy="1617199"/>
           </a:xfrm>
           <a:prstGeom prst="roundRect">
             <a:avLst>
@@ -11993,7 +14435,7 @@
         <p:spPr>
           <a:xfrm>
             <a:off x="978408" y="2112264"/>
-            <a:ext cx="10234879" cy="603504"/>
+            <a:ext cx="10234879" cy="1251439"/>
           </a:xfrm>
           <a:prstGeom prst="rect">
             <a:avLst/>
@@ -12034,7 +14476,7 @@
         </p:nvSpPr>
         <p:spPr>
           <a:xfrm>
-            <a:off x="685800" y="3191256"/>
+            <a:off x="685800" y="3802615"/>
             <a:ext cx="10820095" cy="310896"/>
           </a:xfrm>
           <a:prstGeom prst="rect">
@@ -12060,7 +14502,7 @@
                 </a:solidFill>
                 <a:latin typeface="Calibri"/>
               </a:rPr>
-              <a:t>Work these questions in order:</a:t>
+              <a:t>Work these questions in order</a:t>
             </a:r>
           </a:p>
         </p:txBody>
@@ -12073,8 +14515,8 @@
         </p:nvSpPr>
         <p:spPr>
           <a:xfrm>
-            <a:off x="685800" y="3611879"/>
-            <a:ext cx="5227167" cy="365760"/>
+            <a:off x="685800" y="4278103"/>
+            <a:ext cx="5227167" cy="385501"/>
           </a:xfrm>
           <a:prstGeom prst="rect">
             <a:avLst/>
@@ -12102,7 +14544,7 @@
                 </a:solidFill>
                 <a:latin typeface="Calibri"/>
               </a:rPr>
-              <a:t>→  The six commands, in order.</a:t>
+              <a:t>The six commands, in order.</a:t>
             </a:r>
           </a:p>
         </p:txBody>
@@ -12115,8 +14557,8 @@
         </p:nvSpPr>
         <p:spPr>
           <a:xfrm>
-            <a:off x="685800" y="4032504"/>
-            <a:ext cx="5227167" cy="365760"/>
+            <a:off x="685800" y="4755045"/>
+            <a:ext cx="5227167" cy="385501"/>
           </a:xfrm>
           <a:prstGeom prst="rect">
             <a:avLst/>
@@ -12144,7 +14586,7 @@
                 </a:solidFill>
                 <a:latin typeface="Calibri"/>
               </a:rPr>
-              <a:t>→  One sentence: what is one row?</a:t>
+              <a:t>One sentence: what is one row?</a:t>
             </a:r>
           </a:p>
         </p:txBody>
@@ -12157,8 +14599,8 @@
         </p:nvSpPr>
         <p:spPr>
           <a:xfrm>
-            <a:off x="685800" y="4453128"/>
-            <a:ext cx="5227167" cy="365760"/>
+            <a:off x="685800" y="5231987"/>
+            <a:ext cx="5227167" cy="385501"/>
           </a:xfrm>
           <a:prstGeom prst="rect">
             <a:avLst/>
@@ -12186,7 +14628,7 @@
                 </a:solidFill>
                 <a:latin typeface="Calibri"/>
               </a:rPr>
-              <a:t>→  Every column whose dtype is wrong.</a:t>
+              <a:t>Every column whose dtype is wrong.</a:t>
             </a:r>
           </a:p>
         </p:txBody>
@@ -12199,8 +14641,8 @@
         </p:nvSpPr>
         <p:spPr>
           <a:xfrm>
-            <a:off x="6278727" y="3611879"/>
-            <a:ext cx="5227167" cy="365760"/>
+            <a:off x="6278727" y="4278103"/>
+            <a:ext cx="5227167" cy="385501"/>
           </a:xfrm>
           <a:prstGeom prst="rect">
             <a:avLst/>
@@ -12228,7 +14670,7 @@
                 </a:solidFill>
                 <a:latin typeface="Calibri"/>
               </a:rPr>
-              <a:t>→  Missing values, count and percentage.</a:t>
+              <a:t>Missing values, count and percentage.</a:t>
             </a:r>
           </a:p>
         </p:txBody>
@@ -12241,8 +14683,8 @@
         </p:nvSpPr>
         <p:spPr>
           <a:xfrm>
-            <a:off x="6278727" y="4032504"/>
-            <a:ext cx="5227167" cy="365760"/>
+            <a:off x="6278727" y="4755045"/>
+            <a:ext cx="5227167" cy="385501"/>
           </a:xfrm>
           <a:prstGeom prst="rect">
             <a:avLst/>
@@ -12270,7 +14712,7 @@
                 </a:solidFill>
                 <a:latin typeface="Calibri"/>
               </a:rPr>
-              <a:t>→  The five countries with the most invoices.</a:t>
+              <a:t>The five countries with the most invoices.</a:t>
             </a:r>
           </a:p>
         </p:txBody>
@@ -12283,8 +14725,8 @@
         </p:nvSpPr>
         <p:spPr>
           <a:xfrm>
-            <a:off x="6278727" y="4453128"/>
-            <a:ext cx="5227167" cy="365760"/>
+            <a:off x="6278727" y="5231987"/>
+            <a:ext cx="5227167" cy="385501"/>
           </a:xfrm>
           <a:prstGeom prst="rect">
             <a:avLst/>
@@ -12312,7 +14754,7 @@
                 </a:solidFill>
                 <a:latin typeface="Calibri"/>
               </a:rPr>
-              <a:t>→  Three sentences on what this file is a record of.</a:t>
+              <a:t>Three sentences on what this file is a record of.</a:t>
             </a:r>
           </a:p>
         </p:txBody>
@@ -14961,7 +17403,7 @@
                 </a:solidFill>
                 <a:latin typeface="Calibri"/>
               </a:rPr>
-              <a:t>The profiling routine, in a fixed order, on the course data: shape, head, dtypes, info, isna, value_counts. Six commands, two minutes, and afterwards you can say what the file can and cannot answer. Each command is shown</a:t>
+              <a:t>The profiling routine, in a fixed order, on the course data: shape, head, dtypes, info, isna, value_counts.</a:t>
             </a:r>
           </a:p>
         </p:txBody>
